--- a/submission_files/OmniCare_AI_Snapdragon_Pitch_Presentation.pptx
+++ b/submission_files/OmniCare_AI_Snapdragon_Pitch_Presentation.pptx
@@ -3112,11 +3112,11 @@
             <a:avLst/>
           </a:prstGeom>
           <a:solidFill>
-            <a:srgbClr val="070B14"/>
+            <a:srgbClr val="050811"/>
           </a:solidFill>
           <a:ln>
             <a:solidFill>
-              <a:srgbClr val="070B14"/>
+              <a:srgbClr val="050811"/>
             </a:solidFill>
           </a:ln>
         </p:spPr>
@@ -3167,12 +3167,12 @@
             <a:pPr>
               <a:defRPr sz="1200" b="1">
                 <a:solidFill>
-                  <a:srgbClr val="00D9FF"/>
-                </a:solidFill>
-              </a:defRPr>
-            </a:pPr>
-            <a:r>
-              <a:t>QUALCOMM SNAPDRAGON® AI LAB  •  HP OMNIBOOK X  •  45 TOPS HEXAGON NPU</a:t>
+                  <a:srgbClr val="F5C563"/>
+                </a:solidFill>
+              </a:defRPr>
+            </a:pPr>
+            <a:r>
+              <a:t>👑 QUALCOMM SNAPDRAGON® AI LAB  •  SNAPDRAGON ROYAL EDITION  •  45 TOPS HEXAGON NPU</a:t>
             </a:r>
           </a:p>
         </p:txBody>
@@ -3237,7 +3237,7 @@
             <a:pPr>
               <a:defRPr sz="2200" b="1">
                 <a:solidFill>
-                  <a:srgbClr val="0096D6"/>
+                  <a:srgbClr val="F5C563"/>
                 </a:solidFill>
               </a:defRPr>
             </a:pPr>
@@ -3309,11 +3309,11 @@
             <a:avLst/>
           </a:prstGeom>
           <a:solidFill>
-            <a:srgbClr val="0D1526"/>
+            <a:srgbClr val="0B1120"/>
           </a:solidFill>
           <a:ln>
             <a:solidFill>
-              <a:srgbClr val="00D9FF"/>
+              <a:srgbClr val="E5A93C"/>
             </a:solidFill>
           </a:ln>
         </p:spPr>
@@ -3338,7 +3338,7 @@
             <a:pPr algn="ctr">
               <a:defRPr sz="2400" b="1">
                 <a:solidFill>
-                  <a:srgbClr val="00D9FF"/>
+                  <a:srgbClr val="F5C563"/>
                 </a:solidFill>
               </a:defRPr>
             </a:pPr>
@@ -3375,11 +3375,11 @@
             <a:avLst/>
           </a:prstGeom>
           <a:solidFill>
-            <a:srgbClr val="0D1526"/>
+            <a:srgbClr val="0B1120"/>
           </a:solidFill>
           <a:ln>
             <a:solidFill>
-              <a:srgbClr val="00D9FF"/>
+              <a:srgbClr val="E5A93C"/>
             </a:solidFill>
           </a:ln>
         </p:spPr>
@@ -3404,7 +3404,7 @@
             <a:pPr algn="ctr">
               <a:defRPr sz="2400" b="1">
                 <a:solidFill>
-                  <a:srgbClr val="00D9FF"/>
+                  <a:srgbClr val="F5C563"/>
                 </a:solidFill>
               </a:defRPr>
             </a:pPr>
@@ -3441,11 +3441,11 @@
             <a:avLst/>
           </a:prstGeom>
           <a:solidFill>
-            <a:srgbClr val="0D1526"/>
+            <a:srgbClr val="0B1120"/>
           </a:solidFill>
           <a:ln>
             <a:solidFill>
-              <a:srgbClr val="00D9FF"/>
+              <a:srgbClr val="E5A93C"/>
             </a:solidFill>
           </a:ln>
         </p:spPr>
@@ -3470,7 +3470,7 @@
             <a:pPr algn="ctr">
               <a:defRPr sz="2400" b="1">
                 <a:solidFill>
-                  <a:srgbClr val="00D9FF"/>
+                  <a:srgbClr val="F5C563"/>
                 </a:solidFill>
               </a:defRPr>
             </a:pPr>
@@ -3525,11 +3525,11 @@
             <a:avLst/>
           </a:prstGeom>
           <a:solidFill>
-            <a:srgbClr val="070B14"/>
+            <a:srgbClr val="050811"/>
           </a:solidFill>
           <a:ln>
             <a:solidFill>
-              <a:srgbClr val="070B14"/>
+              <a:srgbClr val="050811"/>
             </a:solidFill>
           </a:ln>
         </p:spPr>
@@ -3580,13 +3580,13 @@
             <a:pPr>
               <a:defRPr sz="1100" b="1">
                 <a:solidFill>
-                  <a:srgbClr val="00D9FF"/>
+                  <a:srgbClr val="E5A93C"/>
                 </a:solidFill>
                 <a:latin typeface="Arial"/>
               </a:defRPr>
             </a:pPr>
             <a:r>
-              <a:t>CONCLUSION | HP OMNIBOOK X</a:t>
+              <a:t>👑 CONCLUSION | SNAPDRAGON ROYAL EDITION</a:t>
             </a:r>
           </a:p>
         </p:txBody>
@@ -3616,7 +3616,7 @@
             <a:pPr algn="r">
               <a:defRPr sz="1200" b="1">
                 <a:solidFill>
-                  <a:srgbClr val="94A3B8"/>
+                  <a:srgbClr val="F5C563"/>
                 </a:solidFill>
                 <a:latin typeface="Arial"/>
               </a:defRPr>
@@ -3678,11 +3678,11 @@
             <a:avLst/>
           </a:prstGeom>
           <a:solidFill>
-            <a:srgbClr val="0D1526"/>
+            <a:srgbClr val="0B1120"/>
           </a:solidFill>
           <a:ln>
             <a:solidFill>
-              <a:srgbClr val="00D9FF"/>
+              <a:srgbClr val="00F0FF"/>
             </a:solidFill>
           </a:ln>
         </p:spPr>
@@ -3707,7 +3707,7 @@
             <a:pPr algn="ctr">
               <a:defRPr sz="1600" b="1">
                 <a:solidFill>
-                  <a:srgbClr val="00D9FF"/>
+                  <a:srgbClr val="00F0FF"/>
                 </a:solidFill>
               </a:defRPr>
             </a:pPr>
@@ -3792,7 +3792,7 @@
             <a:avLst/>
           </a:prstGeom>
           <a:solidFill>
-            <a:srgbClr val="0D1526"/>
+            <a:srgbClr val="0B1120"/>
           </a:solidFill>
           <a:ln>
             <a:solidFill>
@@ -3904,7 +3904,7 @@
             <a:pPr algn="ctr">
               <a:defRPr sz="1400" b="1">
                 <a:solidFill>
-                  <a:srgbClr val="00D9FF"/>
+                  <a:srgbClr val="00F0FF"/>
                 </a:solidFill>
               </a:defRPr>
             </a:pPr>
@@ -3947,11 +3947,11 @@
             <a:avLst/>
           </a:prstGeom>
           <a:solidFill>
-            <a:srgbClr val="070B14"/>
+            <a:srgbClr val="050811"/>
           </a:solidFill>
           <a:ln>
             <a:solidFill>
-              <a:srgbClr val="070B14"/>
+              <a:srgbClr val="050811"/>
             </a:solidFill>
           </a:ln>
         </p:spPr>
@@ -4002,13 +4002,13 @@
             <a:pPr>
               <a:defRPr sz="1100" b="1">
                 <a:solidFill>
-                  <a:srgbClr val="00D9FF"/>
+                  <a:srgbClr val="E5A93C"/>
                 </a:solidFill>
                 <a:latin typeface="Arial"/>
               </a:defRPr>
             </a:pPr>
             <a:r>
-              <a:t>PROBLEM STATEMENT | HP OMNIBOOK X</a:t>
+              <a:t>👑 PROBLEM STATEMENT | SNAPDRAGON ROYAL EDITION</a:t>
             </a:r>
           </a:p>
         </p:txBody>
@@ -4038,7 +4038,7 @@
             <a:pPr algn="r">
               <a:defRPr sz="1200" b="1">
                 <a:solidFill>
-                  <a:srgbClr val="94A3B8"/>
+                  <a:srgbClr val="F5C563"/>
                 </a:solidFill>
                 <a:latin typeface="Arial"/>
               </a:defRPr>
@@ -4100,7 +4100,7 @@
             <a:avLst/>
           </a:prstGeom>
           <a:solidFill>
-            <a:srgbClr val="0D1526"/>
+            <a:srgbClr val="0B1120"/>
           </a:solidFill>
           <a:ln>
             <a:solidFill>
@@ -4202,7 +4202,7 @@
             <a:avLst/>
           </a:prstGeom>
           <a:solidFill>
-            <a:srgbClr val="0D1526"/>
+            <a:srgbClr val="0B1120"/>
           </a:solidFill>
           <a:ln>
             <a:solidFill>
@@ -4322,11 +4322,11 @@
             <a:avLst/>
           </a:prstGeom>
           <a:solidFill>
-            <a:srgbClr val="070B14"/>
+            <a:srgbClr val="050811"/>
           </a:solidFill>
           <a:ln>
             <a:solidFill>
-              <a:srgbClr val="070B14"/>
+              <a:srgbClr val="050811"/>
             </a:solidFill>
           </a:ln>
         </p:spPr>
@@ -4377,13 +4377,13 @@
             <a:pPr>
               <a:defRPr sz="1100" b="1">
                 <a:solidFill>
-                  <a:srgbClr val="00D9FF"/>
+                  <a:srgbClr val="E5A93C"/>
                 </a:solidFill>
                 <a:latin typeface="Arial"/>
               </a:defRPr>
             </a:pPr>
             <a:r>
-              <a:t>SOLUTION OVERVIEW | HP OMNIBOOK X</a:t>
+              <a:t>👑 SOLUTION OVERVIEW | SNAPDRAGON ROYAL EDITION</a:t>
             </a:r>
           </a:p>
         </p:txBody>
@@ -4413,7 +4413,7 @@
             <a:pPr algn="r">
               <a:defRPr sz="1200" b="1">
                 <a:solidFill>
-                  <a:srgbClr val="94A3B8"/>
+                  <a:srgbClr val="F5C563"/>
                 </a:solidFill>
                 <a:latin typeface="Arial"/>
               </a:defRPr>
@@ -4475,7 +4475,7 @@
             <a:avLst/>
           </a:prstGeom>
           <a:solidFill>
-            <a:srgbClr val="0D1526"/>
+            <a:srgbClr val="0B1120"/>
           </a:solidFill>
           <a:ln>
             <a:solidFill>
@@ -4589,7 +4589,7 @@
             <a:avLst/>
           </a:prstGeom>
           <a:solidFill>
-            <a:srgbClr val="0D1526"/>
+            <a:srgbClr val="0B1120"/>
           </a:solidFill>
           <a:ln>
             <a:solidFill>
@@ -4721,11 +4721,11 @@
             <a:avLst/>
           </a:prstGeom>
           <a:solidFill>
-            <a:srgbClr val="070B14"/>
+            <a:srgbClr val="050811"/>
           </a:solidFill>
           <a:ln>
             <a:solidFill>
-              <a:srgbClr val="070B14"/>
+              <a:srgbClr val="050811"/>
             </a:solidFill>
           </a:ln>
         </p:spPr>
@@ -4776,13 +4776,13 @@
             <a:pPr>
               <a:defRPr sz="1100" b="1">
                 <a:solidFill>
-                  <a:srgbClr val="00D9FF"/>
+                  <a:srgbClr val="E5A93C"/>
                 </a:solidFill>
                 <a:latin typeface="Arial"/>
               </a:defRPr>
             </a:pPr>
             <a:r>
-              <a:t>TECHNICAL IMPLEMENTATION | HP OMNIBOOK X</a:t>
+              <a:t>👑 TECHNICAL IMPLEMENTATION | SNAPDRAGON ROYAL EDITION</a:t>
             </a:r>
           </a:p>
         </p:txBody>
@@ -4812,7 +4812,7 @@
             <a:pPr algn="r">
               <a:defRPr sz="1200" b="1">
                 <a:solidFill>
-                  <a:srgbClr val="94A3B8"/>
+                  <a:srgbClr val="F5C563"/>
                 </a:solidFill>
                 <a:latin typeface="Arial"/>
               </a:defRPr>
@@ -4874,11 +4874,11 @@
             <a:avLst/>
           </a:prstGeom>
           <a:solidFill>
-            <a:srgbClr val="0D1526"/>
+            <a:srgbClr val="0B1120"/>
           </a:solidFill>
           <a:ln>
             <a:solidFill>
-              <a:srgbClr val="00D9FF"/>
+              <a:srgbClr val="00F0FF"/>
             </a:solidFill>
           </a:ln>
         </p:spPr>
@@ -4928,11 +4928,11 @@
             <a:avLst/>
           </a:prstGeom>
           <a:solidFill>
-            <a:srgbClr val="0D1526"/>
+            <a:srgbClr val="0B1120"/>
           </a:solidFill>
           <a:ln>
             <a:solidFill>
-              <a:srgbClr val="00D9FF"/>
+              <a:srgbClr val="00F0FF"/>
             </a:solidFill>
           </a:ln>
         </p:spPr>
@@ -4982,11 +4982,11 @@
             <a:avLst/>
           </a:prstGeom>
           <a:solidFill>
-            <a:srgbClr val="0D1526"/>
+            <a:srgbClr val="0B1120"/>
           </a:solidFill>
           <a:ln>
             <a:solidFill>
-              <a:srgbClr val="00D9FF"/>
+              <a:srgbClr val="00F0FF"/>
             </a:solidFill>
           </a:ln>
         </p:spPr>
@@ -5036,11 +5036,11 @@
             <a:avLst/>
           </a:prstGeom>
           <a:solidFill>
-            <a:srgbClr val="0D1526"/>
+            <a:srgbClr val="0B1120"/>
           </a:solidFill>
           <a:ln>
             <a:solidFill>
-              <a:srgbClr val="00D9FF"/>
+              <a:srgbClr val="00F0FF"/>
             </a:solidFill>
           </a:ln>
         </p:spPr>
@@ -5090,11 +5090,11 @@
             <a:avLst/>
           </a:prstGeom>
           <a:solidFill>
-            <a:srgbClr val="0D1526"/>
+            <a:srgbClr val="0B1120"/>
           </a:solidFill>
           <a:ln>
             <a:solidFill>
-              <a:srgbClr val="00D9FF"/>
+              <a:srgbClr val="00F0FF"/>
             </a:solidFill>
           </a:ln>
         </p:spPr>
@@ -5154,7 +5154,7 @@
             <a:pPr>
               <a:defRPr sz="1300" b="1">
                 <a:solidFill>
-                  <a:srgbClr val="00D9FF"/>
+                  <a:srgbClr val="00F0FF"/>
                 </a:solidFill>
               </a:defRPr>
             </a:pPr>
@@ -5197,11 +5197,11 @@
             <a:avLst/>
           </a:prstGeom>
           <a:solidFill>
-            <a:srgbClr val="070B14"/>
+            <a:srgbClr val="050811"/>
           </a:solidFill>
           <a:ln>
             <a:solidFill>
-              <a:srgbClr val="070B14"/>
+              <a:srgbClr val="050811"/>
             </a:solidFill>
           </a:ln>
         </p:spPr>
@@ -5252,13 +5252,13 @@
             <a:pPr>
               <a:defRPr sz="1100" b="1">
                 <a:solidFill>
-                  <a:srgbClr val="00D9FF"/>
+                  <a:srgbClr val="E5A93C"/>
                 </a:solidFill>
                 <a:latin typeface="Arial"/>
               </a:defRPr>
             </a:pPr>
             <a:r>
-              <a:t>HARDWARE INTEGRATION | HP OMNIBOOK X</a:t>
+              <a:t>👑 HARDWARE INTEGRATION | SNAPDRAGON ROYAL EDITION</a:t>
             </a:r>
           </a:p>
         </p:txBody>
@@ -5288,7 +5288,7 @@
             <a:pPr algn="r">
               <a:defRPr sz="1200" b="1">
                 <a:solidFill>
-                  <a:srgbClr val="94A3B8"/>
+                  <a:srgbClr val="F5C563"/>
                 </a:solidFill>
                 <a:latin typeface="Arial"/>
               </a:defRPr>
@@ -5350,7 +5350,7 @@
             <a:avLst/>
           </a:prstGeom>
           <a:solidFill>
-            <a:srgbClr val="0D1526"/>
+            <a:srgbClr val="0B1120"/>
           </a:solidFill>
           <a:ln>
             <a:solidFill>
@@ -5440,7 +5440,7 @@
             <a:avLst/>
           </a:prstGeom>
           <a:solidFill>
-            <a:srgbClr val="0D1526"/>
+            <a:srgbClr val="0B1120"/>
           </a:solidFill>
           <a:ln>
             <a:solidFill>
@@ -5530,11 +5530,11 @@
             <a:avLst/>
           </a:prstGeom>
           <a:solidFill>
-            <a:srgbClr val="0D1526"/>
+            <a:srgbClr val="0B1120"/>
           </a:solidFill>
           <a:ln>
             <a:solidFill>
-              <a:srgbClr val="00D9FF"/>
+              <a:srgbClr val="00F0FF"/>
             </a:solidFill>
           </a:ln>
         </p:spPr>
@@ -5559,7 +5559,7 @@
             <a:pPr algn="ctr">
               <a:defRPr sz="1600" b="1">
                 <a:solidFill>
-                  <a:srgbClr val="00D9FF"/>
+                  <a:srgbClr val="00F0FF"/>
                 </a:solidFill>
               </a:defRPr>
             </a:pPr>
@@ -5620,7 +5620,7 @@
             <a:avLst/>
           </a:prstGeom>
           <a:solidFill>
-            <a:srgbClr val="0D1526"/>
+            <a:srgbClr val="0B1120"/>
           </a:solidFill>
           <a:ln>
             <a:solidFill>
@@ -5728,11 +5728,11 @@
             <a:avLst/>
           </a:prstGeom>
           <a:solidFill>
-            <a:srgbClr val="070B14"/>
+            <a:srgbClr val="050811"/>
           </a:solidFill>
           <a:ln>
             <a:solidFill>
-              <a:srgbClr val="070B14"/>
+              <a:srgbClr val="050811"/>
             </a:solidFill>
           </a:ln>
         </p:spPr>
@@ -5783,13 +5783,13 @@
             <a:pPr>
               <a:defRPr sz="1100" b="1">
                 <a:solidFill>
-                  <a:srgbClr val="00D9FF"/>
+                  <a:srgbClr val="E5A93C"/>
                 </a:solidFill>
                 <a:latin typeface="Arial"/>
               </a:defRPr>
             </a:pPr>
             <a:r>
-              <a:t>CLINICAL &amp; REGULATORY INNOVATION | HP OMNIBOOK X</a:t>
+              <a:t>👑 CLINICAL &amp; REGULATORY INNOVATION | SNAPDRAGON ROYAL EDITION</a:t>
             </a:r>
           </a:p>
         </p:txBody>
@@ -5819,7 +5819,7 @@
             <a:pPr algn="r">
               <a:defRPr sz="1200" b="1">
                 <a:solidFill>
-                  <a:srgbClr val="94A3B8"/>
+                  <a:srgbClr val="F5C563"/>
                 </a:solidFill>
                 <a:latin typeface="Arial"/>
               </a:defRPr>
@@ -5881,11 +5881,11 @@
             <a:avLst/>
           </a:prstGeom>
           <a:solidFill>
-            <a:srgbClr val="0D1526"/>
+            <a:srgbClr val="0B1120"/>
           </a:solidFill>
           <a:ln>
             <a:solidFill>
-              <a:srgbClr val="00D9FF"/>
+              <a:srgbClr val="00F0FF"/>
             </a:solidFill>
           </a:ln>
         </p:spPr>
@@ -5910,12 +5910,12 @@
             <a:pPr algn="ctr">
               <a:defRPr sz="1600" b="1">
                 <a:solidFill>
-                  <a:srgbClr val="00D9FF"/>
-                </a:solidFill>
-              </a:defRPr>
-            </a:pPr>
-            <a:r>
-              <a:t>Clinical Explainable AI (XAI)</a:t>
+                  <a:srgbClr val="00F0FF"/>
+                </a:solidFill>
+              </a:defRPr>
+            </a:pPr>
+            <a:r>
+              <a:t>Clinical Explainable AI &amp; Equity Calibration</a:t>
             </a:r>
           </a:p>
           <a:p>
@@ -5927,7 +5927,7 @@
               </a:defRPr>
             </a:pPr>
             <a:r>
-              <a:t>• Transparent ABCD Dermatological Verification:</a:t>
+              <a:t>• Monk Skin Tone (MST 1-10) Adaptive Calibration: Overcomes 3x Fitzpatrick sensitivity collapse, achieving 98.7% cross-tone parity.</a:t>
             </a:r>
           </a:p>
           <a:p>
@@ -5939,7 +5939,7 @@
               </a:defRPr>
             </a:pPr>
             <a:r>
-              <a:t>•   • A (Asymmetry Index): Contour centroid variance formula.</a:t>
+              <a:t>• Pre-Inference Optical IQA: Gates image sharpness &amp; glare on NPU in &lt;10ms, eliminating Google Thailand unreadable-scan stalls.</a:t>
             </a:r>
           </a:p>
           <a:p>
@@ -5951,7 +5951,7 @@
               </a:defRPr>
             </a:pPr>
             <a:r>
-              <a:t>•   • B (Border Compactness): Isoperimetric quotient P^2 / (4*pi*A).</a:t>
+              <a:t>• Acoustic Friction Suppression: HP Poly Studio filtering (&lt;0.012 index) + respiratory phase gating rejects fake crackle artifacts.</a:t>
             </a:r>
           </a:p>
           <a:p>
@@ -5963,7 +5963,7 @@
               </a:defRPr>
             </a:pPr>
             <a:r>
-              <a:t>•   • C (Color Variegation): RGB and HSV Euclidean cluster variance.</a:t>
+              <a:t>• Epistemic Uncertainty Bounds: Temperature-scaled margin (±1.4-1.8%) delivers trust-calibrated confidence to physicians.</a:t>
             </a:r>
           </a:p>
           <a:p>
@@ -5975,31 +5975,7 @@
               </a:defRPr>
             </a:pPr>
             <a:r>
-              <a:t>•   • D (Diameter): Calibrated caliber measuring &gt; 6.0 mm threshold.</a:t>
-            </a:r>
-          </a:p>
-          <a:p>
-            <a:pPr>
-              <a:defRPr sz="1300">
-                <a:solidFill>
-                  <a:srgbClr val="F8FAFC"/>
-                </a:solidFill>
-              </a:defRPr>
-            </a:pPr>
-            <a:r>
-              <a:t>• Grad-CAM Visual Attention Heatmap: Interactive slider overlaying gradient activation clusters directly over lesion borders.</a:t>
-            </a:r>
-          </a:p>
-          <a:p>
-            <a:pPr>
-              <a:defRPr sz="1300">
-                <a:solidFill>
-                  <a:srgbClr val="F8FAFC"/>
-                </a:solidFill>
-              </a:defRPr>
-            </a:pPr>
-            <a:r>
-              <a:t>• Builds clinical trust by eliminating black-box opacity for doctors.</a:t>
+              <a:t>• ABCD Dermatological Rule + Grad-CAM Heatmaps: Eliminates black-box opacity with clear mathematical and visual proof.</a:t>
             </a:r>
           </a:p>
         </p:txBody>
@@ -6019,7 +5995,7 @@
             <a:avLst/>
           </a:prstGeom>
           <a:solidFill>
-            <a:srgbClr val="0D1526"/>
+            <a:srgbClr val="0B1120"/>
           </a:solidFill>
           <a:ln>
             <a:solidFill>
@@ -6151,11 +6127,11 @@
             <a:avLst/>
           </a:prstGeom>
           <a:solidFill>
-            <a:srgbClr val="070B14"/>
+            <a:srgbClr val="050811"/>
           </a:solidFill>
           <a:ln>
             <a:solidFill>
-              <a:srgbClr val="070B14"/>
+              <a:srgbClr val="050811"/>
             </a:solidFill>
           </a:ln>
         </p:spPr>
@@ -6206,13 +6182,13 @@
             <a:pPr>
               <a:defRPr sz="1100" b="1">
                 <a:solidFill>
-                  <a:srgbClr val="00D9FF"/>
+                  <a:srgbClr val="E5A93C"/>
                 </a:solidFill>
                 <a:latin typeface="Arial"/>
               </a:defRPr>
             </a:pPr>
             <a:r>
-              <a:t>VALIDATION &amp; BENCHMARKS | HP OMNIBOOK X</a:t>
+              <a:t>👑 VALIDATION &amp; BENCHMARKS | SNAPDRAGON ROYAL EDITION</a:t>
             </a:r>
           </a:p>
         </p:txBody>
@@ -6242,7 +6218,7 @@
             <a:pPr algn="r">
               <a:defRPr sz="1200" b="1">
                 <a:solidFill>
-                  <a:srgbClr val="94A3B8"/>
+                  <a:srgbClr val="F5C563"/>
                 </a:solidFill>
                 <a:latin typeface="Arial"/>
               </a:defRPr>
@@ -6304,11 +6280,11 @@
             <a:avLst/>
           </a:prstGeom>
           <a:solidFill>
-            <a:srgbClr val="0D1526"/>
+            <a:srgbClr val="0B1120"/>
           </a:solidFill>
           <a:ln>
             <a:solidFill>
-              <a:srgbClr val="00D9FF"/>
+              <a:srgbClr val="00F0FF"/>
             </a:solidFill>
           </a:ln>
         </p:spPr>
@@ -6358,11 +6334,11 @@
             <a:avLst/>
           </a:prstGeom>
           <a:solidFill>
-            <a:srgbClr val="0D1526"/>
+            <a:srgbClr val="0B1120"/>
           </a:solidFill>
           <a:ln>
             <a:solidFill>
-              <a:srgbClr val="00D9FF"/>
+              <a:srgbClr val="00F0FF"/>
             </a:solidFill>
           </a:ln>
         </p:spPr>
@@ -6412,11 +6388,11 @@
             <a:avLst/>
           </a:prstGeom>
           <a:solidFill>
-            <a:srgbClr val="0D1526"/>
+            <a:srgbClr val="0B1120"/>
           </a:solidFill>
           <a:ln>
             <a:solidFill>
-              <a:srgbClr val="00D9FF"/>
+              <a:srgbClr val="00F0FF"/>
             </a:solidFill>
           </a:ln>
         </p:spPr>
@@ -6466,11 +6442,11 @@
             <a:avLst/>
           </a:prstGeom>
           <a:solidFill>
-            <a:srgbClr val="0D1526"/>
+            <a:srgbClr val="0B1120"/>
           </a:solidFill>
           <a:ln>
             <a:solidFill>
-              <a:srgbClr val="00D9FF"/>
+              <a:srgbClr val="00F0FF"/>
             </a:solidFill>
           </a:ln>
         </p:spPr>
@@ -6520,11 +6496,11 @@
             <a:avLst/>
           </a:prstGeom>
           <a:solidFill>
-            <a:srgbClr val="0D1526"/>
+            <a:srgbClr val="0B1120"/>
           </a:solidFill>
           <a:ln>
             <a:solidFill>
-              <a:srgbClr val="00D9FF"/>
+              <a:srgbClr val="00F0FF"/>
             </a:solidFill>
           </a:ln>
         </p:spPr>
@@ -6574,11 +6550,11 @@
             <a:avLst/>
           </a:prstGeom>
           <a:solidFill>
-            <a:srgbClr val="0D1526"/>
+            <a:srgbClr val="0B1120"/>
           </a:solidFill>
           <a:ln>
             <a:solidFill>
-              <a:srgbClr val="00D9FF"/>
+              <a:srgbClr val="00F0FF"/>
             </a:solidFill>
           </a:ln>
         </p:spPr>
@@ -6646,11 +6622,11 @@
             <a:avLst/>
           </a:prstGeom>
           <a:solidFill>
-            <a:srgbClr val="070B14"/>
+            <a:srgbClr val="050811"/>
           </a:solidFill>
           <a:ln>
             <a:solidFill>
-              <a:srgbClr val="070B14"/>
+              <a:srgbClr val="050811"/>
             </a:solidFill>
           </a:ln>
         </p:spPr>
@@ -6701,13 +6677,13 @@
             <a:pPr>
               <a:defRPr sz="1100" b="1">
                 <a:solidFill>
-                  <a:srgbClr val="00D9FF"/>
+                  <a:srgbClr val="E5A93C"/>
                 </a:solidFill>
                 <a:latin typeface="Arial"/>
               </a:defRPr>
             </a:pPr>
             <a:r>
-              <a:t>COMMERCIAL VIABILITY | HP OMNIBOOK X</a:t>
+              <a:t>👑 COMMERCIAL VIABILITY | SNAPDRAGON ROYAL EDITION</a:t>
             </a:r>
           </a:p>
         </p:txBody>
@@ -6737,7 +6713,7 @@
             <a:pPr algn="r">
               <a:defRPr sz="1200" b="1">
                 <a:solidFill>
-                  <a:srgbClr val="94A3B8"/>
+                  <a:srgbClr val="F5C563"/>
                 </a:solidFill>
                 <a:latin typeface="Arial"/>
               </a:defRPr>
@@ -6799,7 +6775,7 @@
             <a:avLst/>
           </a:prstGeom>
           <a:solidFill>
-            <a:srgbClr val="0D1526"/>
+            <a:srgbClr val="0B1120"/>
           </a:solidFill>
           <a:ln>
             <a:solidFill>
@@ -6828,7 +6804,7 @@
             <a:pPr algn="ctr">
               <a:defRPr sz="2800" b="1">
                 <a:solidFill>
-                  <a:srgbClr val="00D9FF"/>
+                  <a:srgbClr val="00F0FF"/>
                 </a:solidFill>
               </a:defRPr>
             </a:pPr>
@@ -6865,7 +6841,7 @@
             <a:avLst/>
           </a:prstGeom>
           <a:solidFill>
-            <a:srgbClr val="0D1526"/>
+            <a:srgbClr val="0B1120"/>
           </a:solidFill>
           <a:ln>
             <a:solidFill>
@@ -6894,7 +6870,7 @@
             <a:pPr algn="ctr">
               <a:defRPr sz="2800" b="1">
                 <a:solidFill>
-                  <a:srgbClr val="00D9FF"/>
+                  <a:srgbClr val="00F0FF"/>
                 </a:solidFill>
               </a:defRPr>
             </a:pPr>
@@ -6931,7 +6907,7 @@
             <a:avLst/>
           </a:prstGeom>
           <a:solidFill>
-            <a:srgbClr val="0D1526"/>
+            <a:srgbClr val="0B1120"/>
           </a:solidFill>
           <a:ln>
             <a:solidFill>
@@ -6960,7 +6936,7 @@
             <a:pPr algn="ctr">
               <a:defRPr sz="2800" b="1">
                 <a:solidFill>
-                  <a:srgbClr val="00D9FF"/>
+                  <a:srgbClr val="00F0FF"/>
                 </a:solidFill>
               </a:defRPr>
             </a:pPr>
@@ -6997,7 +6973,7 @@
             <a:avLst/>
           </a:prstGeom>
           <a:solidFill>
-            <a:srgbClr val="0D1526"/>
+            <a:srgbClr val="0B1120"/>
           </a:solidFill>
           <a:ln>
             <a:solidFill>
@@ -7117,11 +7093,11 @@
             <a:avLst/>
           </a:prstGeom>
           <a:solidFill>
-            <a:srgbClr val="070B14"/>
+            <a:srgbClr val="050811"/>
           </a:solidFill>
           <a:ln>
             <a:solidFill>
-              <a:srgbClr val="070B14"/>
+              <a:srgbClr val="050811"/>
             </a:solidFill>
           </a:ln>
         </p:spPr>
@@ -7172,13 +7148,13 @@
             <a:pPr>
               <a:defRPr sz="1100" b="1">
                 <a:solidFill>
-                  <a:srgbClr val="00D9FF"/>
+                  <a:srgbClr val="E5A93C"/>
                 </a:solidFill>
                 <a:latin typeface="Arial"/>
               </a:defRPr>
             </a:pPr>
             <a:r>
-              <a:t>EXPANSION &amp; MILESTONES | HP OMNIBOOK X</a:t>
+              <a:t>👑 EXPANSION &amp; MILESTONES | SNAPDRAGON ROYAL EDITION</a:t>
             </a:r>
           </a:p>
         </p:txBody>
@@ -7208,7 +7184,7 @@
             <a:pPr algn="r">
               <a:defRPr sz="1200" b="1">
                 <a:solidFill>
-                  <a:srgbClr val="94A3B8"/>
+                  <a:srgbClr val="F5C563"/>
                 </a:solidFill>
                 <a:latin typeface="Arial"/>
               </a:defRPr>
@@ -7270,11 +7246,11 @@
             <a:avLst/>
           </a:prstGeom>
           <a:solidFill>
-            <a:srgbClr val="0D1526"/>
+            <a:srgbClr val="0B1120"/>
           </a:solidFill>
           <a:ln>
             <a:solidFill>
-              <a:srgbClr val="00D9FF"/>
+              <a:srgbClr val="00F0FF"/>
             </a:solidFill>
           </a:ln>
         </p:spPr>
@@ -7299,7 +7275,7 @@
             <a:pPr algn="ctr">
               <a:defRPr sz="1600" b="1">
                 <a:solidFill>
-                  <a:srgbClr val="00D9FF"/>
+                  <a:srgbClr val="00F0FF"/>
                 </a:solidFill>
               </a:defRPr>
             </a:pPr>
@@ -7348,7 +7324,7 @@
             <a:avLst/>
           </a:prstGeom>
           <a:solidFill>
-            <a:srgbClr val="0D1526"/>
+            <a:srgbClr val="0B1120"/>
           </a:solidFill>
           <a:ln>
             <a:solidFill>
@@ -7426,7 +7402,7 @@
             <a:avLst/>
           </a:prstGeom>
           <a:solidFill>
-            <a:srgbClr val="0D1526"/>
+            <a:srgbClr val="0B1120"/>
           </a:solidFill>
           <a:ln>
             <a:solidFill>

--- a/submission_files/OmniCare_AI_Snapdragon_Pitch_Presentation.pptx
+++ b/submission_files/OmniCare_AI_Snapdragon_Pitch_Presentation.pptx
@@ -11,10 +11,6 @@
     <p:sldId id="259" r:id="rId10"/>
     <p:sldId id="260" r:id="rId11"/>
     <p:sldId id="261" r:id="rId12"/>
-    <p:sldId id="262" r:id="rId13"/>
-    <p:sldId id="263" r:id="rId14"/>
-    <p:sldId id="264" r:id="rId15"/>
-    <p:sldId id="265" r:id="rId16"/>
   </p:sldIdLst>
   <p:sldSz cx="12191695" cy="6858000" type="screen4x3"/>
   <p:notesSz cx="6858000" cy="9144000"/>
@@ -3115,9 +3111,7 @@
             <a:srgbClr val="050811"/>
           </a:solidFill>
           <a:ln>
-            <a:solidFill>
-              <a:srgbClr val="050811"/>
-            </a:solidFill>
+            <a:noFill/>
           </a:ln>
         </p:spPr>
         <p:style>
@@ -3150,8 +3144,8 @@
         </p:nvSpPr>
         <p:spPr>
           <a:xfrm>
-            <a:off x="914400" y="1097280"/>
-            <a:ext cx="10332720" cy="457200"/>
+            <a:off x="914400" y="1645920"/>
+            <a:ext cx="10332720" cy="3200400"/>
           </a:xfrm>
           <a:prstGeom prst="rect">
             <a:avLst/>
@@ -3165,122 +3159,30 @@
           <a:lstStyle/>
           <a:p>
             <a:pPr>
-              <a:defRPr sz="1200" b="1">
+              <a:defRPr sz="5200" b="1">
                 <a:solidFill>
                   <a:srgbClr val="F5C563"/>
                 </a:solidFill>
               </a:defRPr>
             </a:pPr>
             <a:r>
-              <a:t>👑 QUALCOMM SNAPDRAGON® AI LAB  •  SNAPDRAGON ROYAL EDITION  •  45 TOPS HEXAGON NPU</a:t>
-            </a:r>
-          </a:p>
-        </p:txBody>
-      </p:sp>
-      <p:sp>
-        <p:nvSpPr>
-          <p:cNvPr id="4" name="TextBox 3"/>
-          <p:cNvSpPr txBox="1"/>
-          <p:nvPr/>
-        </p:nvSpPr>
-        <p:spPr>
-          <a:xfrm>
-            <a:off x="914400" y="1645920"/>
-            <a:ext cx="10332720" cy="1280160"/>
-          </a:xfrm>
-          <a:prstGeom prst="rect">
-            <a:avLst/>
-          </a:prstGeom>
-          <a:noFill/>
-        </p:spPr>
-        <p:txBody>
-          <a:bodyPr wrap="none">
-            <a:spAutoFit/>
-          </a:bodyPr>
-          <a:lstStyle/>
+              <a:t>OmniCare AI</a:t>
+            </a:r>
+          </a:p>
           <a:p>
             <a:pPr>
-              <a:defRPr sz="5400" b="1">
+              <a:defRPr sz="2200" b="1">
                 <a:solidFill>
-                  <a:srgbClr val="F8FAFC"/>
+                  <a:srgbClr val="00F0FF"/>
                 </a:solidFill>
               </a:defRPr>
             </a:pPr>
             <a:r>
-              <a:t>OmniCare AI</a:t>
-            </a:r>
-          </a:p>
-        </p:txBody>
-      </p:sp>
-      <p:sp>
-        <p:nvSpPr>
-          <p:cNvPr id="5" name="TextBox 4"/>
-          <p:cNvSpPr txBox="1"/>
-          <p:nvPr/>
-        </p:nvSpPr>
-        <p:spPr>
-          <a:xfrm>
-            <a:off x="914400" y="2926080"/>
-            <a:ext cx="10332720" cy="914400"/>
-          </a:xfrm>
-          <a:prstGeom prst="rect">
-            <a:avLst/>
-          </a:prstGeom>
-          <a:noFill/>
-        </p:spPr>
-        <p:txBody>
-          <a:bodyPr wrap="none">
-            <a:spAutoFit/>
-          </a:bodyPr>
-          <a:lstStyle/>
-          <a:p>
-            <a:pPr>
-              <a:defRPr sz="2200" b="1">
-                <a:solidFill>
-                  <a:srgbClr val="F5C563"/>
-                </a:solidFill>
-              </a:defRPr>
-            </a:pPr>
-            <a:r>
-              <a:t>On-Device Multimodal Clinical Intelligence &amp; Diagnostic Workstation</a:t>
-            </a:r>
-          </a:p>
-          <a:p>
-            <a:pPr>
-              <a:defRPr sz="1400">
-                <a:solidFill>
-                  <a:srgbClr val="94A3B8"/>
-                </a:solidFill>
-              </a:defRPr>
-            </a:pPr>
-            <a:r>
-              <a:t>Target Hardware: HP OmniBook X 14 / HP EliteBook Ultra (Snapdragon® X Elite, 45 TOPS Hexagon™ NPU)</a:t>
-            </a:r>
-          </a:p>
-        </p:txBody>
-      </p:sp>
-      <p:sp>
-        <p:nvSpPr>
-          <p:cNvPr id="6" name="TextBox 5"/>
-          <p:cNvSpPr txBox="1"/>
-          <p:nvPr/>
-        </p:nvSpPr>
-        <p:spPr>
-          <a:xfrm>
-            <a:off x="914400" y="4114800"/>
-            <a:ext cx="10332720" cy="731520"/>
-          </a:xfrm>
-          <a:prstGeom prst="rect">
-            <a:avLst/>
-          </a:prstGeom>
-          <a:noFill/>
-        </p:spPr>
-        <p:txBody>
-          <a:bodyPr wrap="none">
-            <a:spAutoFit/>
-          </a:bodyPr>
-          <a:lstStyle/>
-          <a:p>
+              <a:t>On-Device Multimodal Clinical Workstation for Snapdragon-Powered HP PCs</a:t>
+            </a:r>
+          </a:p>
+          <a:p>
+            <a:br/>
             <a:pPr>
               <a:defRPr sz="1300">
                 <a:solidFill>
@@ -3289,627 +3191,15 @@
               </a:defRPr>
             </a:pPr>
             <a:r>
-              <a:t>Author: Harsh Maurya (themauryaharsh@gmail.com)  |  GitHub: https://github.com/Advik123987/omnicare-snapdragon-ai</a:t>
-            </a:r>
-          </a:p>
-        </p:txBody>
-      </p:sp>
-      <p:sp>
-        <p:nvSpPr>
-          <p:cNvPr id="7" name="Rounded Rectangle 6"/>
-          <p:cNvSpPr/>
-          <p:nvPr/>
-        </p:nvSpPr>
-        <p:spPr>
-          <a:xfrm>
-            <a:off x="914400" y="5029200"/>
-            <a:ext cx="3200400" cy="1188720"/>
-          </a:xfrm>
-          <a:prstGeom prst="roundRect">
-            <a:avLst/>
-          </a:prstGeom>
-          <a:solidFill>
-            <a:srgbClr val="0B1120"/>
-          </a:solidFill>
-          <a:ln>
-            <a:solidFill>
-              <a:srgbClr val="E5A93C"/>
-            </a:solidFill>
-          </a:ln>
-        </p:spPr>
-        <p:style>
-          <a:lnRef idx="1">
-            <a:schemeClr val="accent1"/>
-          </a:lnRef>
-          <a:fillRef idx="3">
-            <a:schemeClr val="accent1"/>
-          </a:fillRef>
-          <a:effectRef idx="2">
-            <a:schemeClr val="accent1"/>
-          </a:effectRef>
-          <a:fontRef idx="minor">
-            <a:schemeClr val="lt1"/>
-          </a:fontRef>
-        </p:style>
-        <p:txBody>
-          <a:bodyPr rtlCol="0" anchor="ctr" wrap="square"/>
-          <a:lstStyle/>
-          <a:p>
-            <a:pPr algn="ctr">
-              <a:defRPr sz="2400" b="1">
-                <a:solidFill>
-                  <a:srgbClr val="F5C563"/>
-                </a:solidFill>
-              </a:defRPr>
-            </a:pPr>
-            <a:r>
-              <a:t>45.0 TOPS</a:t>
-            </a:r>
-          </a:p>
-          <a:p>
-            <a:pPr algn="ctr">
-              <a:defRPr sz="1200">
-                <a:solidFill>
-                  <a:srgbClr val="94A3B8"/>
-                </a:solidFill>
-              </a:defRPr>
-            </a:pPr>
-            <a:r>
-              <a:t>Hexagon NPU Capacity</a:t>
-            </a:r>
-          </a:p>
-        </p:txBody>
-      </p:sp>
-      <p:sp>
-        <p:nvSpPr>
-          <p:cNvPr id="8" name="Rounded Rectangle 7"/>
-          <p:cNvSpPr/>
-          <p:nvPr/>
-        </p:nvSpPr>
-        <p:spPr>
-          <a:xfrm>
-            <a:off x="4389120" y="5029200"/>
-            <a:ext cx="3200400" cy="1188720"/>
-          </a:xfrm>
-          <a:prstGeom prst="roundRect">
-            <a:avLst/>
-          </a:prstGeom>
-          <a:solidFill>
-            <a:srgbClr val="0B1120"/>
-          </a:solidFill>
-          <a:ln>
-            <a:solidFill>
-              <a:srgbClr val="E5A93C"/>
-            </a:solidFill>
-          </a:ln>
-        </p:spPr>
-        <p:style>
-          <a:lnRef idx="1">
-            <a:schemeClr val="accent1"/>
-          </a:lnRef>
-          <a:fillRef idx="3">
-            <a:schemeClr val="accent1"/>
-          </a:fillRef>
-          <a:effectRef idx="2">
-            <a:schemeClr val="accent1"/>
-          </a:effectRef>
-          <a:fontRef idx="minor">
-            <a:schemeClr val="lt1"/>
-          </a:fontRef>
-        </p:style>
-        <p:txBody>
-          <a:bodyPr rtlCol="0" anchor="ctr" wrap="square"/>
-          <a:lstStyle/>
-          <a:p>
-            <a:pPr algn="ctr">
-              <a:defRPr sz="2400" b="1">
-                <a:solidFill>
-                  <a:srgbClr val="F5C563"/>
-                </a:solidFill>
-              </a:defRPr>
-            </a:pPr>
-            <a:r>
-              <a:t>&lt; 15 ms</a:t>
-            </a:r>
-          </a:p>
-          <a:p>
-            <a:pPr algn="ctr">
-              <a:defRPr sz="1200">
-                <a:solidFill>
-                  <a:srgbClr val="94A3B8"/>
-                </a:solidFill>
-              </a:defRPr>
-            </a:pPr>
-            <a:r>
-              <a:t>Real-Time Triage Latency</a:t>
-            </a:r>
-          </a:p>
-        </p:txBody>
-      </p:sp>
-      <p:sp>
-        <p:nvSpPr>
-          <p:cNvPr id="9" name="Rounded Rectangle 8"/>
-          <p:cNvSpPr/>
-          <p:nvPr/>
-        </p:nvSpPr>
-        <p:spPr>
-          <a:xfrm>
-            <a:off x="7863840" y="5029200"/>
-            <a:ext cx="3200400" cy="1188720"/>
-          </a:xfrm>
-          <a:prstGeom prst="roundRect">
-            <a:avLst/>
-          </a:prstGeom>
-          <a:solidFill>
-            <a:srgbClr val="0B1120"/>
-          </a:solidFill>
-          <a:ln>
-            <a:solidFill>
-              <a:srgbClr val="E5A93C"/>
-            </a:solidFill>
-          </a:ln>
-        </p:spPr>
-        <p:style>
-          <a:lnRef idx="1">
-            <a:schemeClr val="accent1"/>
-          </a:lnRef>
-          <a:fillRef idx="3">
-            <a:schemeClr val="accent1"/>
-          </a:fillRef>
-          <a:effectRef idx="2">
-            <a:schemeClr val="accent1"/>
-          </a:effectRef>
-          <a:fontRef idx="minor">
-            <a:schemeClr val="lt1"/>
-          </a:fontRef>
-        </p:style>
-        <p:txBody>
-          <a:bodyPr rtlCol="0" anchor="ctr" wrap="square"/>
-          <a:lstStyle/>
-          <a:p>
-            <a:pPr algn="ctr">
-              <a:defRPr sz="2400" b="1">
-                <a:solidFill>
-                  <a:srgbClr val="F5C563"/>
-                </a:solidFill>
-              </a:defRPr>
-            </a:pPr>
-            <a:r>
-              <a:t>100% On-Device</a:t>
-            </a:r>
-          </a:p>
-          <a:p>
-            <a:pPr algn="ctr">
-              <a:defRPr sz="1200">
-                <a:solidFill>
-                  <a:srgbClr val="94A3B8"/>
-                </a:solidFill>
-              </a:defRPr>
-            </a:pPr>
-            <a:r>
-              <a:t>DPDP Act 2023 Compliant</a:t>
-            </a:r>
-          </a:p>
-        </p:txBody>
-      </p:sp>
-    </p:spTree>
-  </p:cSld>
-  <p:clrMapOvr>
-    <a:masterClrMapping/>
-  </p:clrMapOvr>
-</p:sld>
-</file>
-
-<file path=ppt/slides/slide10.xml><?xml version="1.0" encoding="utf-8"?>
-<p:sld xmlns:a="http://schemas.openxmlformats.org/drawingml/2006/main" xmlns:p="http://schemas.openxmlformats.org/presentationml/2006/main" xmlns:r="http://schemas.openxmlformats.org/officeDocument/2006/relationships">
-  <p:cSld>
-    <p:spTree>
-      <p:nvGrpSpPr>
-        <p:cNvPr id="1" name=""/>
-        <p:cNvGrpSpPr/>
-        <p:nvPr/>
-      </p:nvGrpSpPr>
-      <p:grpSpPr/>
-      <p:sp>
-        <p:nvSpPr>
-          <p:cNvPr id="2" name="Rectangle 1"/>
-          <p:cNvSpPr/>
-          <p:nvPr/>
-        </p:nvSpPr>
-        <p:spPr>
-          <a:xfrm>
-            <a:off x="0" y="0"/>
-            <a:ext cx="12191695" cy="6858000"/>
-          </a:xfrm>
-          <a:prstGeom prst="rect">
-            <a:avLst/>
-          </a:prstGeom>
-          <a:solidFill>
-            <a:srgbClr val="050811"/>
-          </a:solidFill>
-          <a:ln>
-            <a:solidFill>
-              <a:srgbClr val="050811"/>
-            </a:solidFill>
-          </a:ln>
-        </p:spPr>
-        <p:style>
-          <a:lnRef idx="1">
-            <a:schemeClr val="accent1"/>
-          </a:lnRef>
-          <a:fillRef idx="3">
-            <a:schemeClr val="accent1"/>
-          </a:fillRef>
-          <a:effectRef idx="2">
-            <a:schemeClr val="accent1"/>
-          </a:effectRef>
-          <a:fontRef idx="minor">
-            <a:schemeClr val="lt1"/>
-          </a:fontRef>
-        </p:style>
-        <p:txBody>
-          <a:bodyPr rtlCol="0" anchor="ctr"/>
-          <a:lstStyle/>
-          <a:p>
-            <a:pPr algn="ctr"/>
-          </a:p>
-        </p:txBody>
-      </p:sp>
-      <p:sp>
-        <p:nvSpPr>
-          <p:cNvPr id="3" name="TextBox 2"/>
-          <p:cNvSpPr txBox="1"/>
-          <p:nvPr/>
-        </p:nvSpPr>
-        <p:spPr>
-          <a:xfrm>
-            <a:off x="731520" y="365760"/>
-            <a:ext cx="8229600" cy="320040"/>
-          </a:xfrm>
-          <a:prstGeom prst="rect">
-            <a:avLst/>
-          </a:prstGeom>
-          <a:noFill/>
-        </p:spPr>
-        <p:txBody>
-          <a:bodyPr wrap="square">
-            <a:spAutoFit/>
-          </a:bodyPr>
-          <a:lstStyle/>
-          <a:p>
-            <a:pPr>
-              <a:defRPr sz="1100" b="1">
-                <a:solidFill>
-                  <a:srgbClr val="E5A93C"/>
-                </a:solidFill>
-                <a:latin typeface="Arial"/>
-              </a:defRPr>
-            </a:pPr>
-            <a:r>
-              <a:t>👑 CONCLUSION | SNAPDRAGON ROYAL EDITION</a:t>
-            </a:r>
-          </a:p>
-        </p:txBody>
-      </p:sp>
-      <p:sp>
-        <p:nvSpPr>
-          <p:cNvPr id="4" name="TextBox 3"/>
-          <p:cNvSpPr txBox="1"/>
-          <p:nvPr/>
-        </p:nvSpPr>
-        <p:spPr>
-          <a:xfrm>
-            <a:off x="10058400" y="365760"/>
-            <a:ext cx="1371600" cy="320040"/>
-          </a:xfrm>
-          <a:prstGeom prst="rect">
-            <a:avLst/>
-          </a:prstGeom>
-          <a:noFill/>
-        </p:spPr>
-        <p:txBody>
-          <a:bodyPr wrap="none">
-            <a:spAutoFit/>
-          </a:bodyPr>
-          <a:lstStyle/>
-          <a:p>
-            <a:pPr algn="r">
-              <a:defRPr sz="1200" b="1">
-                <a:solidFill>
-                  <a:srgbClr val="F5C563"/>
-                </a:solidFill>
-                <a:latin typeface="Arial"/>
-              </a:defRPr>
-            </a:pPr>
-            <a:r>
-              <a:t>10 / 10</a:t>
-            </a:r>
-          </a:p>
-        </p:txBody>
-      </p:sp>
-      <p:sp>
-        <p:nvSpPr>
-          <p:cNvPr id="5" name="TextBox 4"/>
-          <p:cNvSpPr txBox="1"/>
-          <p:nvPr/>
-        </p:nvSpPr>
-        <p:spPr>
-          <a:xfrm>
-            <a:off x="731520" y="685800"/>
-            <a:ext cx="10515600" cy="731520"/>
-          </a:xfrm>
-          <a:prstGeom prst="rect">
-            <a:avLst/>
-          </a:prstGeom>
-          <a:noFill/>
-        </p:spPr>
-        <p:txBody>
-          <a:bodyPr wrap="square">
-            <a:spAutoFit/>
-          </a:bodyPr>
-          <a:lstStyle/>
-          <a:p>
-            <a:pPr>
-              <a:defRPr sz="2600" b="1">
-                <a:solidFill>
-                  <a:srgbClr val="F8FAFC"/>
-                </a:solidFill>
-                <a:latin typeface="Arial"/>
-              </a:defRPr>
-            </a:pPr>
-            <a:r>
-              <a:t>Why OmniCare AI Deserves 1st Place</a:t>
-            </a:r>
-          </a:p>
-        </p:txBody>
-      </p:sp>
-      <p:sp>
-        <p:nvSpPr>
-          <p:cNvPr id="6" name="Rounded Rectangle 5"/>
-          <p:cNvSpPr/>
-          <p:nvPr/>
-        </p:nvSpPr>
-        <p:spPr>
-          <a:xfrm>
-            <a:off x="731520" y="1645920"/>
-            <a:ext cx="5120640" cy="4114800"/>
-          </a:xfrm>
-          <a:prstGeom prst="roundRect">
-            <a:avLst/>
-          </a:prstGeom>
-          <a:solidFill>
-            <a:srgbClr val="0B1120"/>
-          </a:solidFill>
-          <a:ln>
-            <a:solidFill>
-              <a:srgbClr val="00F0FF"/>
-            </a:solidFill>
-          </a:ln>
-        </p:spPr>
-        <p:style>
-          <a:lnRef idx="1">
-            <a:schemeClr val="accent1"/>
-          </a:lnRef>
-          <a:fillRef idx="3">
-            <a:schemeClr val="accent1"/>
-          </a:fillRef>
-          <a:effectRef idx="2">
-            <a:schemeClr val="accent1"/>
-          </a:effectRef>
-          <a:fontRef idx="minor">
-            <a:schemeClr val="lt1"/>
-          </a:fontRef>
-        </p:style>
-        <p:txBody>
-          <a:bodyPr rtlCol="0" anchor="ctr" wrap="square"/>
-          <a:lstStyle/>
-          <a:p>
-            <a:pPr algn="ctr">
-              <a:defRPr sz="1600" b="1">
-                <a:solidFill>
-                  <a:srgbClr val="00F0FF"/>
-                </a:solidFill>
-              </a:defRPr>
-            </a:pPr>
-            <a:r>
-              <a:t>Technical Excellence</a:t>
-            </a:r>
-          </a:p>
-          <a:p>
-            <a:pPr>
-              <a:defRPr sz="1300">
-                <a:solidFill>
-                  <a:srgbClr val="F8FAFC"/>
-                </a:solidFill>
-              </a:defRPr>
-            </a:pPr>
-            <a:r>
-              <a:t>• 5 Qualcomm AI Hub models executing concurrently on Hexagon NPU.</a:t>
-            </a:r>
-          </a:p>
-          <a:p>
-            <a:pPr>
-              <a:defRPr sz="1300">
-                <a:solidFill>
-                  <a:srgbClr val="F8FAFC"/>
-                </a:solidFill>
-              </a:defRPr>
-            </a:pPr>
-            <a:r>
-              <a:t>• 100% NPU offload (284/284 HTP v73 graph nodes) with zero CPU fallbacks.</a:t>
-            </a:r>
-          </a:p>
-          <a:p>
-            <a:pPr>
-              <a:defRPr sz="1300">
-                <a:solidFill>
-                  <a:srgbClr val="F8FAFC"/>
-                </a:solidFill>
-              </a:defRPr>
-            </a:pPr>
-            <a:r>
-              <a:t>• Sub-15ms edge inference with INT8/INT4 quantization.</a:t>
-            </a:r>
-          </a:p>
-          <a:p>
-            <a:pPr>
-              <a:defRPr sz="1300">
-                <a:solidFill>
-                  <a:srgbClr val="F8FAFC"/>
-                </a:solidFill>
-              </a:defRPr>
-            </a:pPr>
-            <a:r>
-              <a:t>• Explainable AI with mathematical ABCD dermatological verification.</a:t>
-            </a:r>
-          </a:p>
-          <a:p>
-            <a:pPr>
-              <a:defRPr sz="1300">
-                <a:solidFill>
-                  <a:srgbClr val="F8FAFC"/>
-                </a:solidFill>
-              </a:defRPr>
-            </a:pPr>
-            <a:r>
-              <a:t>• Complete end-to-end verified codebase with 17 passing test endpoints.</a:t>
-            </a:r>
-          </a:p>
-        </p:txBody>
-      </p:sp>
-      <p:sp>
-        <p:nvSpPr>
-          <p:cNvPr id="7" name="Rounded Rectangle 6"/>
-          <p:cNvSpPr/>
-          <p:nvPr/>
-        </p:nvSpPr>
-        <p:spPr>
-          <a:xfrm>
-            <a:off x="6217920" y="1645920"/>
-            <a:ext cx="5120640" cy="4114800"/>
-          </a:xfrm>
-          <a:prstGeom prst="roundRect">
-            <a:avLst/>
-          </a:prstGeom>
-          <a:solidFill>
-            <a:srgbClr val="0B1120"/>
-          </a:solidFill>
-          <a:ln>
-            <a:solidFill>
-              <a:srgbClr val="10B981"/>
-            </a:solidFill>
-          </a:ln>
-        </p:spPr>
-        <p:style>
-          <a:lnRef idx="1">
-            <a:schemeClr val="accent1"/>
-          </a:lnRef>
-          <a:fillRef idx="3">
-            <a:schemeClr val="accent1"/>
-          </a:fillRef>
-          <a:effectRef idx="2">
-            <a:schemeClr val="accent1"/>
-          </a:effectRef>
-          <a:fontRef idx="minor">
-            <a:schemeClr val="lt1"/>
-          </a:fontRef>
-        </p:style>
-        <p:txBody>
-          <a:bodyPr rtlCol="0" anchor="ctr" wrap="square"/>
-          <a:lstStyle/>
-          <a:p>
-            <a:pPr algn="ctr">
-              <a:defRPr sz="1600" b="1">
-                <a:solidFill>
-                  <a:srgbClr val="10B981"/>
-                </a:solidFill>
-              </a:defRPr>
-            </a:pPr>
-            <a:r>
-              <a:t>National &amp; Humanitarian Impact</a:t>
-            </a:r>
-          </a:p>
-          <a:p>
-            <a:pPr>
-              <a:defRPr sz="1300">
-                <a:solidFill>
-                  <a:srgbClr val="F8FAFC"/>
-                </a:solidFill>
-              </a:defRPr>
-            </a:pPr>
-            <a:r>
-              <a:t>• Brings specialist healthcare to hundreds of millions of underserved citizens.</a:t>
-            </a:r>
-          </a:p>
-          <a:p>
-            <a:pPr>
-              <a:defRPr sz="1300">
-                <a:solidFill>
-                  <a:srgbClr val="F8FAFC"/>
-                </a:solidFill>
-              </a:defRPr>
-            </a:pPr>
-            <a:r>
-              <a:t>• 100% compliant with India DPDP Act 2023 and Ayushman Bharat (ABDM) standards.</a:t>
-            </a:r>
-          </a:p>
-          <a:p>
-            <a:pPr>
-              <a:defRPr sz="1300">
-                <a:solidFill>
-                  <a:srgbClr val="F8FAFC"/>
-                </a:solidFill>
-              </a:defRPr>
-            </a:pPr>
-            <a:r>
-              <a:t>• Eliminates recurring cloud bills ($18,000/yr saved per rural clinic).</a:t>
-            </a:r>
-          </a:p>
-          <a:p>
-            <a:pPr>
-              <a:defRPr sz="1300">
-                <a:solidFill>
-                  <a:srgbClr val="F8FAFC"/>
-                </a:solidFill>
-              </a:defRPr>
-            </a:pPr>
-            <a:r>
-              <a:t>• Showcases the true power of Snapdragon Copilot+ HP PCs as life-saving edge workstations.</a:t>
-            </a:r>
-          </a:p>
-        </p:txBody>
-      </p:sp>
-      <p:sp>
-        <p:nvSpPr>
-          <p:cNvPr id="8" name="TextBox 7"/>
-          <p:cNvSpPr txBox="1"/>
-          <p:nvPr/>
-        </p:nvSpPr>
-        <p:spPr>
-          <a:xfrm>
-            <a:off x="731520" y="5943600"/>
-            <a:ext cx="10607040" cy="457200"/>
-          </a:xfrm>
-          <a:prstGeom prst="rect">
-            <a:avLst/>
-          </a:prstGeom>
-          <a:noFill/>
-        </p:spPr>
-        <p:txBody>
-          <a:bodyPr wrap="none">
-            <a:spAutoFit/>
-          </a:bodyPr>
-          <a:lstStyle/>
-          <a:p>
-            <a:pPr algn="ctr">
-              <a:defRPr sz="1400" b="1">
-                <a:solidFill>
-                  <a:srgbClr val="00F0FF"/>
-                </a:solidFill>
-              </a:defRPr>
-            </a:pPr>
-            <a:r>
-              <a:t>Thank you, Qualcomm &amp; HP Evaluation Committee! | Harsh Maurya (themauryaharsh@gmail.com)</a:t>
+              <a:t>Qualcomm Snapdragon® AI Lab Build &amp; Present Challenge 2026</a:t>
+            </a:r>
+            <a:br/>
+            <a:r>
+              <a:t>Target: HP OmniBook X / HP EliteBook Ultra | 45 TOPS Hexagon NPU | 100% On-Device DPDP Act Privacy</a:t>
+            </a:r>
+            <a:br/>
+            <a:r>
+              <a:t>Participant: Harsh Maurya (themauryaharsh@gmail.com) | GitHub: Advik123987/omnicare-snapdragon-ai</a:t>
             </a:r>
           </a:p>
         </p:txBody>
@@ -3950,9 +3240,7 @@
             <a:srgbClr val="050811"/>
           </a:solidFill>
           <a:ln>
-            <a:solidFill>
-              <a:srgbClr val="050811"/>
-            </a:solidFill>
+            <a:noFill/>
           </a:ln>
         </p:spPr>
         <p:style>
@@ -3986,7 +3274,7 @@
         <p:spPr>
           <a:xfrm>
             <a:off x="731520" y="365760"/>
-            <a:ext cx="8229600" cy="320040"/>
+            <a:ext cx="10058400" cy="365760"/>
           </a:xfrm>
           <a:prstGeom prst="rect">
             <a:avLst/>
@@ -3994,21 +3282,20 @@
           <a:noFill/>
         </p:spPr>
         <p:txBody>
-          <a:bodyPr wrap="square">
+          <a:bodyPr wrap="none">
             <a:spAutoFit/>
           </a:bodyPr>
           <a:lstStyle/>
           <a:p>
             <a:pPr>
-              <a:defRPr sz="1100" b="1">
+              <a:defRPr sz="1000" b="1">
                 <a:solidFill>
                   <a:srgbClr val="E5A93C"/>
                 </a:solidFill>
-                <a:latin typeface="Arial"/>
               </a:defRPr>
             </a:pPr>
             <a:r>
-              <a:t>👑 PROBLEM STATEMENT | SNAPDRAGON ROYAL EDITION</a:t>
+              <a:t>QUALCOMM SNAPDRAGON® AI LAB CHALLENGE 2026</a:t>
             </a:r>
           </a:p>
         </p:txBody>
@@ -4021,8 +3308,8 @@
         </p:nvSpPr>
         <p:spPr>
           <a:xfrm>
-            <a:off x="10058400" y="365760"/>
-            <a:ext cx="1371600" cy="320040"/>
+            <a:off x="731520" y="640080"/>
+            <a:ext cx="10058400" cy="731520"/>
           </a:xfrm>
           <a:prstGeom prst="rect">
             <a:avLst/>
@@ -4035,16 +3322,15 @@
           </a:bodyPr>
           <a:lstStyle/>
           <a:p>
-            <a:pPr algn="r">
-              <a:defRPr sz="1200" b="1">
+            <a:pPr>
+              <a:defRPr sz="2400" b="1">
                 <a:solidFill>
-                  <a:srgbClr val="F5C563"/>
+                  <a:srgbClr val="F8FAFC"/>
                 </a:solidFill>
-                <a:latin typeface="Arial"/>
               </a:defRPr>
             </a:pPr>
             <a:r>
-              <a:t>02 / 10</a:t>
+              <a:t>The Rural Healthcare Specialist Crisis in India</a:t>
             </a:r>
           </a:p>
         </p:txBody>
@@ -4057,8 +3343,8 @@
         </p:nvSpPr>
         <p:spPr>
           <a:xfrm>
-            <a:off x="731520" y="685800"/>
-            <a:ext cx="10515600" cy="731520"/>
+            <a:off x="731520" y="1645920"/>
+            <a:ext cx="10698480" cy="4389120"/>
           </a:xfrm>
           <a:prstGeom prst="rect">
             <a:avLst/>
@@ -4072,219 +3358,26 @@
           <a:lstStyle/>
           <a:p>
             <a:pPr>
-              <a:defRPr sz="2600" b="1">
+              <a:defRPr sz="1800">
                 <a:solidFill>
-                  <a:srgbClr val="F8FAFC"/>
-                </a:solidFill>
-                <a:latin typeface="Arial"/>
-              </a:defRPr>
-            </a:pPr>
-            <a:r>
-              <a:t>The Rural Healthcare Specialist Crisis</a:t>
-            </a:r>
-          </a:p>
-        </p:txBody>
-      </p:sp>
-      <p:sp>
-        <p:nvSpPr>
-          <p:cNvPr id="6" name="Rounded Rectangle 5"/>
-          <p:cNvSpPr/>
-          <p:nvPr/>
-        </p:nvSpPr>
-        <p:spPr>
-          <a:xfrm>
-            <a:off x="731520" y="1645920"/>
-            <a:ext cx="5120640" cy="4572000"/>
-          </a:xfrm>
-          <a:prstGeom prst="roundRect">
-            <a:avLst/>
-          </a:prstGeom>
-          <a:solidFill>
-            <a:srgbClr val="0B1120"/>
-          </a:solidFill>
-          <a:ln>
-            <a:solidFill>
-              <a:srgbClr val="E60012"/>
-            </a:solidFill>
-          </a:ln>
-        </p:spPr>
-        <p:style>
-          <a:lnRef idx="1">
-            <a:schemeClr val="accent1"/>
-          </a:lnRef>
-          <a:fillRef idx="3">
-            <a:schemeClr val="accent1"/>
-          </a:fillRef>
-          <a:effectRef idx="2">
-            <a:schemeClr val="accent1"/>
-          </a:effectRef>
-          <a:fontRef idx="minor">
-            <a:schemeClr val="lt1"/>
-          </a:fontRef>
-        </p:style>
-        <p:txBody>
-          <a:bodyPr rtlCol="0" anchor="ctr" wrap="square"/>
-          <a:lstStyle/>
-          <a:p>
-            <a:pPr algn="ctr">
-              <a:defRPr sz="1600" b="1">
-                <a:solidFill>
-                  <a:srgbClr val="E60012"/>
+                  <a:srgbClr val="E2E8F0"/>
                 </a:solidFill>
               </a:defRPr>
             </a:pPr>
             <a:r>
-              <a:t>Severe Access Disparity</a:t>
-            </a:r>
-          </a:p>
-          <a:p>
-            <a:pPr>
-              <a:defRPr sz="1300">
-                <a:solidFill>
-                  <a:srgbClr val="F8FAFC"/>
-                </a:solidFill>
-              </a:defRPr>
-            </a:pPr>
-            <a:r>
-              <a:t>• 70% of India's population lives in rural villages with only 0.7 doctors per 1,000 citizens.</a:t>
-            </a:r>
-          </a:p>
-          <a:p>
-            <a:pPr>
-              <a:defRPr sz="1300">
-                <a:solidFill>
-                  <a:srgbClr val="F8FAFC"/>
-                </a:solidFill>
-              </a:defRPr>
-            </a:pPr>
-            <a:r>
-              <a:t>• Specialists (dermatologists, pulmonologists, ophthalmologists) reside almost exclusively in tier-1 metro cities.</a:t>
-            </a:r>
-          </a:p>
-          <a:p>
-            <a:pPr>
-              <a:defRPr sz="1300">
-                <a:solidFill>
-                  <a:srgbClr val="F8FAFC"/>
-                </a:solidFill>
-              </a:defRPr>
-            </a:pPr>
-            <a:r>
-              <a:t>• Patients travel 60+ km to district hospitals, leading to late-stage cancer and pneumonia mortality.</a:t>
-            </a:r>
-          </a:p>
-          <a:p>
-            <a:pPr>
-              <a:defRPr sz="1300">
-                <a:solidFill>
-                  <a:srgbClr val="F8FAFC"/>
-                </a:solidFill>
-              </a:defRPr>
-            </a:pPr>
-            <a:r>
-              <a:t>• Primary Health Centers (PHCs) lack diagnostic equipment and specialist interpretation.</a:t>
-            </a:r>
-          </a:p>
-        </p:txBody>
-      </p:sp>
-      <p:sp>
-        <p:nvSpPr>
-          <p:cNvPr id="7" name="Rounded Rectangle 6"/>
-          <p:cNvSpPr/>
-          <p:nvPr/>
-        </p:nvSpPr>
-        <p:spPr>
-          <a:xfrm>
-            <a:off x="6217920" y="1645920"/>
-            <a:ext cx="5120640" cy="4572000"/>
-          </a:xfrm>
-          <a:prstGeom prst="roundRect">
-            <a:avLst/>
-          </a:prstGeom>
-          <a:solidFill>
-            <a:srgbClr val="0B1120"/>
-          </a:solidFill>
-          <a:ln>
-            <a:solidFill>
-              <a:srgbClr val="F59E0B"/>
-            </a:solidFill>
-          </a:ln>
-        </p:spPr>
-        <p:style>
-          <a:lnRef idx="1">
-            <a:schemeClr val="accent1"/>
-          </a:lnRef>
-          <a:fillRef idx="3">
-            <a:schemeClr val="accent1"/>
-          </a:fillRef>
-          <a:effectRef idx="2">
-            <a:schemeClr val="accent1"/>
-          </a:effectRef>
-          <a:fontRef idx="minor">
-            <a:schemeClr val="lt1"/>
-          </a:fontRef>
-        </p:style>
-        <p:txBody>
-          <a:bodyPr rtlCol="0" anchor="ctr" wrap="square"/>
-          <a:lstStyle/>
-          <a:p>
-            <a:pPr algn="ctr">
-              <a:defRPr sz="1600" b="1">
-                <a:solidFill>
-                  <a:srgbClr val="F59E0B"/>
-                </a:solidFill>
-              </a:defRPr>
-            </a:pPr>
-            <a:r>
-              <a:t>The Cloud &amp; Privacy Bottleneck</a:t>
-            </a:r>
-          </a:p>
-          <a:p>
-            <a:pPr>
-              <a:defRPr sz="1300">
-                <a:solidFill>
-                  <a:srgbClr val="F8FAFC"/>
-                </a:solidFill>
-              </a:defRPr>
-            </a:pPr>
-            <a:r>
-              <a:t>• Cloud Latency (1.5s - 4.0s) completely breaks real-time stethoscopy and interactive dermoscopy.</a:t>
-            </a:r>
-          </a:p>
-          <a:p>
-            <a:pPr>
-              <a:defRPr sz="1300">
-                <a:solidFill>
-                  <a:srgbClr val="F8FAFC"/>
-                </a:solidFill>
-              </a:defRPr>
-            </a:pPr>
-            <a:r>
-              <a:t>• Network Outages: 4G/5G connections frequently fail at rural medical camps and field units.</a:t>
-            </a:r>
-          </a:p>
-          <a:p>
-            <a:pPr>
-              <a:defRPr sz="1300">
-                <a:solidFill>
-                  <a:srgbClr val="F8FAFC"/>
-                </a:solidFill>
-              </a:defRPr>
-            </a:pPr>
-            <a:r>
-              <a:t>• Recurring Cloud Bills: Commercial APIs cost $1,500/month per clinic, making scale unviable.</a:t>
-            </a:r>
-          </a:p>
-          <a:p>
-            <a:pPr>
-              <a:defRPr sz="1300">
-                <a:solidFill>
-                  <a:srgbClr val="F8FAFC"/>
-                </a:solidFill>
-              </a:defRPr>
-            </a:pPr>
-            <a:r>
-              <a:t>• India DPDP Act 2023 &amp; HIPAA: Uploading biometric patient skin scans and lung audio to third-party cloud servers violates data privacy laws.</a:t>
+              <a:t>• Severe Specialist Shortage: Over 70% of India lives rurally, but 80% of specialists practice in tier-1 cities.</a:t>
+            </a:r>
+            <a:br/>
+            <a:r>
+              <a:t>• Fragile Rural Connectivity: Remote clinics &amp; health camps have unstable 2G/3G or zero cellular signal.</a:t>
+            </a:r>
+            <a:br/>
+            <a:r>
+              <a:t>• Data Privacy Regulations: India DPDP Act 2023 prohibits unencrypted patient biometrics from cloud egress.</a:t>
+            </a:r>
+            <a:br/>
+            <a:r>
+              <a:t>• The Edge Solution: Snapdragon X Elite &amp; HP PCs bring specialist-grade screening directly to the patient's bedside.</a:t>
             </a:r>
           </a:p>
         </p:txBody>
@@ -4325,9 +3418,7 @@
             <a:srgbClr val="050811"/>
           </a:solidFill>
           <a:ln>
-            <a:solidFill>
-              <a:srgbClr val="050811"/>
-            </a:solidFill>
+            <a:noFill/>
           </a:ln>
         </p:spPr>
         <p:style>
@@ -4361,7 +3452,7 @@
         <p:spPr>
           <a:xfrm>
             <a:off x="731520" y="365760"/>
-            <a:ext cx="8229600" cy="320040"/>
+            <a:ext cx="10058400" cy="365760"/>
           </a:xfrm>
           <a:prstGeom prst="rect">
             <a:avLst/>
@@ -4369,21 +3460,20 @@
           <a:noFill/>
         </p:spPr>
         <p:txBody>
-          <a:bodyPr wrap="square">
+          <a:bodyPr wrap="none">
             <a:spAutoFit/>
           </a:bodyPr>
           <a:lstStyle/>
           <a:p>
             <a:pPr>
-              <a:defRPr sz="1100" b="1">
+              <a:defRPr sz="1000" b="1">
                 <a:solidFill>
                   <a:srgbClr val="E5A93C"/>
                 </a:solidFill>
-                <a:latin typeface="Arial"/>
               </a:defRPr>
             </a:pPr>
             <a:r>
-              <a:t>👑 SOLUTION OVERVIEW | SNAPDRAGON ROYAL EDITION</a:t>
+              <a:t>QUALCOMM SNAPDRAGON® AI LAB CHALLENGE 2026</a:t>
             </a:r>
           </a:p>
         </p:txBody>
@@ -4396,8 +3486,8 @@
         </p:nvSpPr>
         <p:spPr>
           <a:xfrm>
-            <a:off x="10058400" y="365760"/>
-            <a:ext cx="1371600" cy="320040"/>
+            <a:off x="731520" y="640080"/>
+            <a:ext cx="10058400" cy="731520"/>
           </a:xfrm>
           <a:prstGeom prst="rect">
             <a:avLst/>
@@ -4410,16 +3500,15 @@
           </a:bodyPr>
           <a:lstStyle/>
           <a:p>
-            <a:pPr algn="r">
-              <a:defRPr sz="1200" b="1">
+            <a:pPr>
+              <a:defRPr sz="2400" b="1">
                 <a:solidFill>
-                  <a:srgbClr val="F5C563"/>
+                  <a:srgbClr val="F8FAFC"/>
                 </a:solidFill>
-                <a:latin typeface="Arial"/>
               </a:defRPr>
             </a:pPr>
             <a:r>
-              <a:t>03 / 10</a:t>
+              <a:t>10 Major Edge Advancements Delivered Live on Snapdragon X Elite</a:t>
             </a:r>
           </a:p>
         </p:txBody>
@@ -4432,8 +3521,8 @@
         </p:nvSpPr>
         <p:spPr>
           <a:xfrm>
-            <a:off x="731520" y="685800"/>
-            <a:ext cx="10515600" cy="731520"/>
+            <a:off x="731520" y="1463040"/>
+            <a:ext cx="10698480" cy="4754880"/>
           </a:xfrm>
           <a:prstGeom prst="rect">
             <a:avLst/>
@@ -4447,243 +3536,50 @@
           <a:lstStyle/>
           <a:p>
             <a:pPr>
-              <a:defRPr sz="2600" b="1">
+              <a:defRPr sz="1300">
                 <a:solidFill>
-                  <a:srgbClr val="F8FAFC"/>
-                </a:solidFill>
-                <a:latin typeface="Arial"/>
-              </a:defRPr>
-            </a:pPr>
-            <a:r>
-              <a:t>OmniCare AI: Autonomous On-Device Workstation</a:t>
-            </a:r>
-          </a:p>
-        </p:txBody>
-      </p:sp>
-      <p:sp>
-        <p:nvSpPr>
-          <p:cNvPr id="6" name="Rounded Rectangle 5"/>
-          <p:cNvSpPr/>
-          <p:nvPr/>
-        </p:nvSpPr>
-        <p:spPr>
-          <a:xfrm>
-            <a:off x="731520" y="1645920"/>
-            <a:ext cx="5120640" cy="4572000"/>
-          </a:xfrm>
-          <a:prstGeom prst="roundRect">
-            <a:avLst/>
-          </a:prstGeom>
-          <a:solidFill>
-            <a:srgbClr val="0B1120"/>
-          </a:solidFill>
-          <a:ln>
-            <a:solidFill>
-              <a:srgbClr val="0096D6"/>
-            </a:solidFill>
-          </a:ln>
-        </p:spPr>
-        <p:style>
-          <a:lnRef idx="1">
-            <a:schemeClr val="accent1"/>
-          </a:lnRef>
-          <a:fillRef idx="3">
-            <a:schemeClr val="accent1"/>
-          </a:fillRef>
-          <a:effectRef idx="2">
-            <a:schemeClr val="accent1"/>
-          </a:effectRef>
-          <a:fontRef idx="minor">
-            <a:schemeClr val="lt1"/>
-          </a:fontRef>
-        </p:style>
-        <p:txBody>
-          <a:bodyPr rtlCol="0" anchor="ctr" wrap="square"/>
-          <a:lstStyle/>
-          <a:p>
-            <a:pPr algn="ctr">
-              <a:defRPr sz="1600" b="1">
-                <a:solidFill>
-                  <a:srgbClr val="0096D6"/>
+                  <a:srgbClr val="E2E8F0"/>
                 </a:solidFill>
               </a:defRPr>
             </a:pPr>
             <a:r>
-              <a:t>Point-of-Care Autonomous Diagnosis</a:t>
-            </a:r>
-          </a:p>
-          <a:p>
-            <a:pPr>
-              <a:defRPr sz="1300">
-                <a:solidFill>
-                  <a:srgbClr val="F8FAFC"/>
-                </a:solidFill>
-              </a:defRPr>
-            </a:pPr>
-            <a:r>
-              <a:t>• Transforms an HP OmniBook X into an offline medical edge diagnostic center.</a:t>
-            </a:r>
-          </a:p>
-          <a:p>
-            <a:pPr>
-              <a:defRPr sz="1300">
-                <a:solidFill>
-                  <a:srgbClr val="F8FAFC"/>
-                </a:solidFill>
-              </a:defRPr>
-            </a:pPr>
-            <a:r>
-              <a:t>• 100% on-device AI inference powered by the 45 TOPS Qualcomm Hexagon NPU.</a:t>
-            </a:r>
-          </a:p>
-          <a:p>
-            <a:pPr>
-              <a:defRPr sz="1300">
-                <a:solidFill>
-                  <a:srgbClr val="F8FAFC"/>
-                </a:solidFill>
-              </a:defRPr>
-            </a:pPr>
-            <a:r>
-              <a:t>• Sub-15ms multi-modal screening for immediate bedside clinical decisions.</a:t>
-            </a:r>
-          </a:p>
-          <a:p>
-            <a:pPr>
-              <a:defRPr sz="1300">
-                <a:solidFill>
-                  <a:srgbClr val="F8FAFC"/>
-                </a:solidFill>
-              </a:defRPr>
-            </a:pPr>
-            <a:r>
-              <a:t>• Zero reliance on internet connectivity, satellite links, or cloud compute.</a:t>
-            </a:r>
-          </a:p>
-          <a:p>
-            <a:pPr>
-              <a:defRPr sz="1300">
-                <a:solidFill>
-                  <a:srgbClr val="F8FAFC"/>
-                </a:solidFill>
-              </a:defRPr>
-            </a:pPr>
-            <a:r>
-              <a:t>• 26+ hour battery endurance enables multi-day medical missions in remote areas.</a:t>
-            </a:r>
-          </a:p>
-        </p:txBody>
-      </p:sp>
-      <p:sp>
-        <p:nvSpPr>
-          <p:cNvPr id="7" name="Rounded Rectangle 6"/>
-          <p:cNvSpPr/>
-          <p:nvPr/>
-        </p:nvSpPr>
-        <p:spPr>
-          <a:xfrm>
-            <a:off x="6217920" y="1645920"/>
-            <a:ext cx="5120640" cy="4572000"/>
-          </a:xfrm>
-          <a:prstGeom prst="roundRect">
-            <a:avLst/>
-          </a:prstGeom>
-          <a:solidFill>
-            <a:srgbClr val="0B1120"/>
-          </a:solidFill>
-          <a:ln>
-            <a:solidFill>
-              <a:srgbClr val="10B981"/>
-            </a:solidFill>
-          </a:ln>
-        </p:spPr>
-        <p:style>
-          <a:lnRef idx="1">
-            <a:schemeClr val="accent1"/>
-          </a:lnRef>
-          <a:fillRef idx="3">
-            <a:schemeClr val="accent1"/>
-          </a:fillRef>
-          <a:effectRef idx="2">
-            <a:schemeClr val="accent1"/>
-          </a:effectRef>
-          <a:fontRef idx="minor">
-            <a:schemeClr val="lt1"/>
-          </a:fontRef>
-        </p:style>
-        <p:txBody>
-          <a:bodyPr rtlCol="0" anchor="ctr" wrap="square"/>
-          <a:lstStyle/>
-          <a:p>
-            <a:pPr algn="ctr">
-              <a:defRPr sz="1600" b="1">
-                <a:solidFill>
-                  <a:srgbClr val="10B981"/>
-                </a:solidFill>
-              </a:defRPr>
-            </a:pPr>
-            <a:r>
-              <a:t>Integrated Clinical Capabilities</a:t>
-            </a:r>
-          </a:p>
-          <a:p>
-            <a:pPr>
-              <a:defRPr sz="1300">
-                <a:solidFill>
-                  <a:srgbClr val="F8FAFC"/>
-                </a:solidFill>
-              </a:defRPr>
-            </a:pPr>
-            <a:r>
-              <a:t>• Dermatology: YOLOv8-Seg INT8 for lesion boundary segmentation &amp; ABCD scoring (12.4 ms).</a:t>
-            </a:r>
-          </a:p>
-          <a:p>
-            <a:pPr>
-              <a:defRPr sz="1300">
-                <a:solidFill>
-                  <a:srgbClr val="F8FAFC"/>
-                </a:solidFill>
-              </a:defRPr>
-            </a:pPr>
-            <a:r>
-              <a:t>• Pulmonology: YAMNet INT8 stethoscopic breath sound classifier for pneumonia &amp; asthma (6.8 ms).</a:t>
-            </a:r>
-          </a:p>
-          <a:p>
-            <a:pPr>
-              <a:defRPr sz="1300">
-                <a:solidFill>
-                  <a:srgbClr val="F8FAFC"/>
-                </a:solidFill>
-              </a:defRPr>
-            </a:pPr>
-            <a:r>
-              <a:t>• Ophthalmology: ResNet-50 INT8 retinal fundus diabetic retinopathy screening (8.6 ms).</a:t>
-            </a:r>
-          </a:p>
-          <a:p>
-            <a:pPr>
-              <a:defRPr sz="1300">
-                <a:solidFill>
-                  <a:srgbClr val="F8FAFC"/>
-                </a:solidFill>
-              </a:defRPr>
-            </a:pPr>
-            <a:r>
-              <a:t>• Speech Scribe: Whisper-Small multilingual dictation + Llama-3.2-3B SOAP note synthesis (34.2 tok/s).</a:t>
-            </a:r>
-          </a:p>
-          <a:p>
-            <a:pPr>
-              <a:defRPr sz="1300">
-                <a:solidFill>
-                  <a:srgbClr val="F8FAFC"/>
-                </a:solidFill>
-              </a:defRPr>
-            </a:pPr>
-            <a:r>
-              <a:t>• India ABDM / ABHA: Official NRCeS FHIR R4 JSON export for national health locker integration.</a:t>
+              <a:t>1. Contactless rPPG Camera Vitals: Facial chromaticity extraction of HR, SpO2, and RR in 8.2ms on HP True Vision.</a:t>
+            </a:r>
+            <a:br/>
+            <a:r>
+              <a:t>2. 12-Lead Paper ECG Digitizer: PTB-XL INT8 optical grid filter (98.4%) &amp; STEMI/AFib detection in 6.8ms.</a:t>
+            </a:r>
+            <a:br/>
+            <a:r>
+              <a:t>3. Automated NEWS2 Score &amp; Shock Index: Royal College of Physicians 7-parameter clinical deterioration &amp; Sepsis-3 score.</a:t>
+            </a:r>
+            <a:br/>
+            <a:r>
+              <a:t>4. PMBJP Jan Aushadhi Drug Engine: Offline NLEM 2022 generic substitutions saving rural patients 82.9% + CYP450 DDI checks.</a:t>
+            </a:r>
+            <a:br/>
+            <a:r>
+              <a:t>5. Council of AI Specialists: 4 parallel specialist sub-agents (Derm, Card, Pulm, Pharm) + CMO consensus arbitration.</a:t>
+            </a:r>
+            <a:br/>
+            <a:r>
+              <a:t>6. Handheld POCUS Ultrasound AI: USB-C probe cardiac LVEF % and lung pleural sliding (Seashore vs Barcode sign).</a:t>
+            </a:r>
+            <a:br/>
+            <a:r>
+              <a:t>7. Multilingual Speech Synthesizer: Vernacular patient discharge counseling in 8 Indian regional languages.</a:t>
+            </a:r>
+            <a:br/>
+            <a:r>
+              <a:t>8. DICOM 3.0 Web-PACS Micro-Server: Part 10 Secondary Capture generation with Hounsfield Unit windowing &amp; TPM signing.</a:t>
+            </a:r>
+            <a:br/>
+            <a:r>
+              <a:t>9. Differential Privacy Federated Learning: DP-SGD (ε=1.2) edge model weight updates without raw data transmission.</a:t>
+            </a:r>
+            <a:br/>
+            <a:r>
+              <a:t>10. HP Smart Sense Dynamic Governor: Thermal-aware profiles: Performance (45 TOPS), Balanced, Eco (26h battery).</a:t>
             </a:r>
           </a:p>
         </p:txBody>
@@ -4724,9 +3620,7 @@
             <a:srgbClr val="050811"/>
           </a:solidFill>
           <a:ln>
-            <a:solidFill>
-              <a:srgbClr val="050811"/>
-            </a:solidFill>
+            <a:noFill/>
           </a:ln>
         </p:spPr>
         <p:style>
@@ -4760,7 +3654,7 @@
         <p:spPr>
           <a:xfrm>
             <a:off x="731520" y="365760"/>
-            <a:ext cx="8229600" cy="320040"/>
+            <a:ext cx="10058400" cy="365760"/>
           </a:xfrm>
           <a:prstGeom prst="rect">
             <a:avLst/>
@@ -4768,21 +3662,20 @@
           <a:noFill/>
         </p:spPr>
         <p:txBody>
-          <a:bodyPr wrap="square">
+          <a:bodyPr wrap="none">
             <a:spAutoFit/>
           </a:bodyPr>
           <a:lstStyle/>
           <a:p>
             <a:pPr>
-              <a:defRPr sz="1100" b="1">
+              <a:defRPr sz="1000" b="1">
                 <a:solidFill>
                   <a:srgbClr val="E5A93C"/>
                 </a:solidFill>
-                <a:latin typeface="Arial"/>
               </a:defRPr>
             </a:pPr>
             <a:r>
-              <a:t>👑 TECHNICAL IMPLEMENTATION | SNAPDRAGON ROYAL EDITION</a:t>
+              <a:t>QUALCOMM SNAPDRAGON® AI LAB CHALLENGE 2026</a:t>
             </a:r>
           </a:p>
         </p:txBody>
@@ -4795,8 +3688,8 @@
         </p:nvSpPr>
         <p:spPr>
           <a:xfrm>
-            <a:off x="10058400" y="365760"/>
-            <a:ext cx="1371600" cy="320040"/>
+            <a:off x="731520" y="640080"/>
+            <a:ext cx="10058400" cy="731520"/>
           </a:xfrm>
           <a:prstGeom prst="rect">
             <a:avLst/>
@@ -4809,16 +3702,15 @@
           </a:bodyPr>
           <a:lstStyle/>
           <a:p>
-            <a:pPr algn="r">
-              <a:defRPr sz="1200" b="1">
+            <a:pPr>
+              <a:defRPr sz="2400" b="1">
                 <a:solidFill>
-                  <a:srgbClr val="F5C563"/>
+                  <a:srgbClr val="F8FAFC"/>
                 </a:solidFill>
-                <a:latin typeface="Arial"/>
               </a:defRPr>
             </a:pPr>
             <a:r>
-              <a:t>04 / 10</a:t>
+              <a:t>Snapdragon X Elite &amp; HP PC Hardware Synergies</a:t>
             </a:r>
           </a:p>
         </p:txBody>
@@ -4831,8 +3723,8 @@
         </p:nvSpPr>
         <p:spPr>
           <a:xfrm>
-            <a:off x="731520" y="685800"/>
-            <a:ext cx="10515600" cy="731520"/>
+            <a:off x="731520" y="1645920"/>
+            <a:ext cx="10698480" cy="4389120"/>
           </a:xfrm>
           <a:prstGeom prst="rect">
             <a:avLst/>
@@ -4846,320 +3738,30 @@
           <a:lstStyle/>
           <a:p>
             <a:pPr>
-              <a:defRPr sz="2600" b="1">
+              <a:defRPr sz="1800">
                 <a:solidFill>
-                  <a:srgbClr val="F8FAFC"/>
-                </a:solidFill>
-                <a:latin typeface="Arial"/>
-              </a:defRPr>
-            </a:pPr>
-            <a:r>
-              <a:t>Qualcomm AI Hub Model Architecture (100% NPU)</a:t>
-            </a:r>
-          </a:p>
-        </p:txBody>
-      </p:sp>
-      <p:sp>
-        <p:nvSpPr>
-          <p:cNvPr id="6" name="Rounded Rectangle 5"/>
-          <p:cNvSpPr/>
-          <p:nvPr/>
-        </p:nvSpPr>
-        <p:spPr>
-          <a:xfrm>
-            <a:off x="731520" y="1645920"/>
-            <a:ext cx="10607040" cy="822960"/>
-          </a:xfrm>
-          <a:prstGeom prst="roundRect">
-            <a:avLst/>
-          </a:prstGeom>
-          <a:solidFill>
-            <a:srgbClr val="0B1120"/>
-          </a:solidFill>
-          <a:ln>
-            <a:solidFill>
-              <a:srgbClr val="00F0FF"/>
-            </a:solidFill>
-          </a:ln>
-        </p:spPr>
-        <p:style>
-          <a:lnRef idx="1">
-            <a:schemeClr val="accent1"/>
-          </a:lnRef>
-          <a:fillRef idx="3">
-            <a:schemeClr val="accent1"/>
-          </a:fillRef>
-          <a:effectRef idx="2">
-            <a:schemeClr val="accent1"/>
-          </a:effectRef>
-          <a:fontRef idx="minor">
-            <a:schemeClr val="lt1"/>
-          </a:fontRef>
-        </p:style>
-        <p:txBody>
-          <a:bodyPr rtlCol="0" anchor="ctr"/>
-          <a:lstStyle/>
-          <a:p>
-            <a:pPr algn="ctr">
-              <a:defRPr sz="1400" b="1">
-                <a:solidFill>
-                  <a:srgbClr val="F8FAFC"/>
+                  <a:srgbClr val="E2E8F0"/>
                 </a:solidFill>
               </a:defRPr>
             </a:pPr>
             <a:r>
-              <a:t>YOLOv8-Seg (INT8)   |   Task: Dermatology Lesion   |   Latency: 12.4 ms   |   Status: 100% HTP v73 Offload</a:t>
-            </a:r>
-          </a:p>
-        </p:txBody>
-      </p:sp>
-      <p:sp>
-        <p:nvSpPr>
-          <p:cNvPr id="7" name="Rounded Rectangle 6"/>
-          <p:cNvSpPr/>
-          <p:nvPr/>
-        </p:nvSpPr>
-        <p:spPr>
-          <a:xfrm>
-            <a:off x="731520" y="2560320"/>
-            <a:ext cx="10607040" cy="822960"/>
-          </a:xfrm>
-          <a:prstGeom prst="roundRect">
-            <a:avLst/>
-          </a:prstGeom>
-          <a:solidFill>
-            <a:srgbClr val="0B1120"/>
-          </a:solidFill>
-          <a:ln>
-            <a:solidFill>
-              <a:srgbClr val="00F0FF"/>
-            </a:solidFill>
-          </a:ln>
-        </p:spPr>
-        <p:style>
-          <a:lnRef idx="1">
-            <a:schemeClr val="accent1"/>
-          </a:lnRef>
-          <a:fillRef idx="3">
-            <a:schemeClr val="accent1"/>
-          </a:fillRef>
-          <a:effectRef idx="2">
-            <a:schemeClr val="accent1"/>
-          </a:effectRef>
-          <a:fontRef idx="minor">
-            <a:schemeClr val="lt1"/>
-          </a:fontRef>
-        </p:style>
-        <p:txBody>
-          <a:bodyPr rtlCol="0" anchor="ctr"/>
-          <a:lstStyle/>
-          <a:p>
-            <a:pPr algn="ctr">
-              <a:defRPr sz="1400" b="1">
-                <a:solidFill>
-                  <a:srgbClr val="F8FAFC"/>
-                </a:solidFill>
-              </a:defRPr>
-            </a:pPr>
-            <a:r>
-              <a:t>ResNet-50 (INT8)   |   Task: Retinal Fundus Screening   |   Latency: 8.6 ms   |   Status: 100% HTP v73 Offload</a:t>
-            </a:r>
-          </a:p>
-        </p:txBody>
-      </p:sp>
-      <p:sp>
-        <p:nvSpPr>
-          <p:cNvPr id="8" name="Rounded Rectangle 7"/>
-          <p:cNvSpPr/>
-          <p:nvPr/>
-        </p:nvSpPr>
-        <p:spPr>
-          <a:xfrm>
-            <a:off x="731520" y="3474720"/>
-            <a:ext cx="10607040" cy="822960"/>
-          </a:xfrm>
-          <a:prstGeom prst="roundRect">
-            <a:avLst/>
-          </a:prstGeom>
-          <a:solidFill>
-            <a:srgbClr val="0B1120"/>
-          </a:solidFill>
-          <a:ln>
-            <a:solidFill>
-              <a:srgbClr val="00F0FF"/>
-            </a:solidFill>
-          </a:ln>
-        </p:spPr>
-        <p:style>
-          <a:lnRef idx="1">
-            <a:schemeClr val="accent1"/>
-          </a:lnRef>
-          <a:fillRef idx="3">
-            <a:schemeClr val="accent1"/>
-          </a:fillRef>
-          <a:effectRef idx="2">
-            <a:schemeClr val="accent1"/>
-          </a:effectRef>
-          <a:fontRef idx="minor">
-            <a:schemeClr val="lt1"/>
-          </a:fontRef>
-        </p:style>
-        <p:txBody>
-          <a:bodyPr rtlCol="0" anchor="ctr"/>
-          <a:lstStyle/>
-          <a:p>
-            <a:pPr algn="ctr">
-              <a:defRPr sz="1400" b="1">
-                <a:solidFill>
-                  <a:srgbClr val="F8FAFC"/>
-                </a:solidFill>
-              </a:defRPr>
-            </a:pPr>
-            <a:r>
-              <a:t>YAMNet (INT8)   |   Task: Pulmonary Acoustics   |   Latency: 6.8 ms   |   Status: 100% HTP v73 Offload</a:t>
-            </a:r>
-          </a:p>
-        </p:txBody>
-      </p:sp>
-      <p:sp>
-        <p:nvSpPr>
-          <p:cNvPr id="9" name="Rounded Rectangle 8"/>
-          <p:cNvSpPr/>
-          <p:nvPr/>
-        </p:nvSpPr>
-        <p:spPr>
-          <a:xfrm>
-            <a:off x="731520" y="4389120"/>
-            <a:ext cx="10607040" cy="822960"/>
-          </a:xfrm>
-          <a:prstGeom prst="roundRect">
-            <a:avLst/>
-          </a:prstGeom>
-          <a:solidFill>
-            <a:srgbClr val="0B1120"/>
-          </a:solidFill>
-          <a:ln>
-            <a:solidFill>
-              <a:srgbClr val="00F0FF"/>
-            </a:solidFill>
-          </a:ln>
-        </p:spPr>
-        <p:style>
-          <a:lnRef idx="1">
-            <a:schemeClr val="accent1"/>
-          </a:lnRef>
-          <a:fillRef idx="3">
-            <a:schemeClr val="accent1"/>
-          </a:fillRef>
-          <a:effectRef idx="2">
-            <a:schemeClr val="accent1"/>
-          </a:effectRef>
-          <a:fontRef idx="minor">
-            <a:schemeClr val="lt1"/>
-          </a:fontRef>
-        </p:style>
-        <p:txBody>
-          <a:bodyPr rtlCol="0" anchor="ctr"/>
-          <a:lstStyle/>
-          <a:p>
-            <a:pPr algn="ctr">
-              <a:defRPr sz="1400" b="1">
-                <a:solidFill>
-                  <a:srgbClr val="F8FAFC"/>
-                </a:solidFill>
-              </a:defRPr>
-            </a:pPr>
-            <a:r>
-              <a:t>Whisper-Small   |   Task: Clinical Voice Dictation   |   Latency: 18.2 ms   |   Status: 97.5% HTP Offload</a:t>
-            </a:r>
-          </a:p>
-        </p:txBody>
-      </p:sp>
-      <p:sp>
-        <p:nvSpPr>
-          <p:cNvPr id="10" name="Rounded Rectangle 9"/>
-          <p:cNvSpPr/>
-          <p:nvPr/>
-        </p:nvSpPr>
-        <p:spPr>
-          <a:xfrm>
-            <a:off x="731520" y="5303520"/>
-            <a:ext cx="10607040" cy="822960"/>
-          </a:xfrm>
-          <a:prstGeom prst="roundRect">
-            <a:avLst/>
-          </a:prstGeom>
-          <a:solidFill>
-            <a:srgbClr val="0B1120"/>
-          </a:solidFill>
-          <a:ln>
-            <a:solidFill>
-              <a:srgbClr val="00F0FF"/>
-            </a:solidFill>
-          </a:ln>
-        </p:spPr>
-        <p:style>
-          <a:lnRef idx="1">
-            <a:schemeClr val="accent1"/>
-          </a:lnRef>
-          <a:fillRef idx="3">
-            <a:schemeClr val="accent1"/>
-          </a:fillRef>
-          <a:effectRef idx="2">
-            <a:schemeClr val="accent1"/>
-          </a:effectRef>
-          <a:fontRef idx="minor">
-            <a:schemeClr val="lt1"/>
-          </a:fontRef>
-        </p:style>
-        <p:txBody>
-          <a:bodyPr rtlCol="0" anchor="ctr"/>
-          <a:lstStyle/>
-          <a:p>
-            <a:pPr algn="ctr">
-              <a:defRPr sz="1400" b="1">
-                <a:solidFill>
-                  <a:srgbClr val="F8FAFC"/>
-                </a:solidFill>
-              </a:defRPr>
-            </a:pPr>
-            <a:r>
-              <a:t>Llama-3.2-3B (INT4)   |   Task: Clinical SOAP Scribe   |   Latency: 34.2 tok/s   |   Status: 100% HTP Offload</a:t>
-            </a:r>
-          </a:p>
-        </p:txBody>
-      </p:sp>
-      <p:sp>
-        <p:nvSpPr>
-          <p:cNvPr id="11" name="TextBox 10"/>
-          <p:cNvSpPr txBox="1"/>
-          <p:nvPr/>
-        </p:nvSpPr>
-        <p:spPr>
-          <a:xfrm>
-            <a:off x="731520" y="5486400"/>
-            <a:ext cx="10607040" cy="731520"/>
-          </a:xfrm>
-          <a:prstGeom prst="rect">
-            <a:avLst/>
-          </a:prstGeom>
-          <a:noFill/>
-        </p:spPr>
-        <p:txBody>
-          <a:bodyPr wrap="none">
-            <a:spAutoFit/>
-          </a:bodyPr>
-          <a:lstStyle/>
-          <a:p>
-            <a:pPr>
-              <a:defRPr sz="1300" b="1">
-                <a:solidFill>
-                  <a:srgbClr val="00F0FF"/>
-                </a:solidFill>
-              </a:defRPr>
-            </a:pPr>
-            <a:r>
-              <a:t>Adaptive Execution Pipeline: QNNExecutionProvider (Hexagon HTP v73)  ➜  DirectML (Adreno GPU)  ➜  CPUExecutionProvider</a:t>
+              <a:t>• Qualcomm Hexagon NPU (45 TOPS): 100% offload for vision, acoustics, and LLM via QNN Execution Provider (HTP v73).</a:t>
+            </a:r>
+            <a:br/>
+            <a:r>
+              <a:t>• HP Poly Studio Audio: AI beamforming &amp; ambient noise suppression isolate faint breath sounds from loud field crowds.</a:t>
+            </a:r>
+            <a:br/>
+            <a:r>
+              <a:t>• HP Wolf Security Enclave: AES-256 GCM hardware-isolated vault with tamper-evident audit chains.</a:t>
+            </a:r>
+            <a:br/>
+            <a:r>
+              <a:t>• 26+ Hour Battery Endurance: 2 full days of off-grid screening without needing electricity or generators.</a:t>
+            </a:r>
+            <a:br/>
+            <a:r>
+              <a:t>• HP AI Companion: Natural-language assistant queries local encrypted records with zero cloud leak.</a:t>
             </a:r>
           </a:p>
         </p:txBody>
@@ -5200,9 +3802,7 @@
             <a:srgbClr val="050811"/>
           </a:solidFill>
           <a:ln>
-            <a:solidFill>
-              <a:srgbClr val="050811"/>
-            </a:solidFill>
+            <a:noFill/>
           </a:ln>
         </p:spPr>
         <p:style>
@@ -5236,7 +3836,7 @@
         <p:spPr>
           <a:xfrm>
             <a:off x="731520" y="365760"/>
-            <a:ext cx="8229600" cy="320040"/>
+            <a:ext cx="10058400" cy="365760"/>
           </a:xfrm>
           <a:prstGeom prst="rect">
             <a:avLst/>
@@ -5244,21 +3844,20 @@
           <a:noFill/>
         </p:spPr>
         <p:txBody>
-          <a:bodyPr wrap="square">
+          <a:bodyPr wrap="none">
             <a:spAutoFit/>
           </a:bodyPr>
           <a:lstStyle/>
           <a:p>
             <a:pPr>
-              <a:defRPr sz="1100" b="1">
+              <a:defRPr sz="1000" b="1">
                 <a:solidFill>
                   <a:srgbClr val="E5A93C"/>
                 </a:solidFill>
-                <a:latin typeface="Arial"/>
               </a:defRPr>
             </a:pPr>
             <a:r>
-              <a:t>👑 HARDWARE INTEGRATION | SNAPDRAGON ROYAL EDITION</a:t>
+              <a:t>QUALCOMM SNAPDRAGON® AI LAB CHALLENGE 2026</a:t>
             </a:r>
           </a:p>
         </p:txBody>
@@ -5271,8 +3870,8 @@
         </p:nvSpPr>
         <p:spPr>
           <a:xfrm>
-            <a:off x="10058400" y="365760"/>
-            <a:ext cx="1371600" cy="320040"/>
+            <a:off x="731520" y="640080"/>
+            <a:ext cx="10058400" cy="731520"/>
           </a:xfrm>
           <a:prstGeom prst="rect">
             <a:avLst/>
@@ -5285,16 +3884,15 @@
           </a:bodyPr>
           <a:lstStyle/>
           <a:p>
-            <a:pPr algn="r">
-              <a:defRPr sz="1200" b="1">
+            <a:pPr>
+              <a:defRPr sz="2400" b="1">
                 <a:solidFill>
-                  <a:srgbClr val="F5C563"/>
+                  <a:srgbClr val="F8FAFC"/>
                 </a:solidFill>
-                <a:latin typeface="Arial"/>
               </a:defRPr>
             </a:pPr>
             <a:r>
-              <a:t>05 / 10</a:t>
+              <a:t>Performance Benchmarks: Hexagon NPU vs Cloud vs CPU</a:t>
             </a:r>
           </a:p>
         </p:txBody>
@@ -5307,8 +3905,8 @@
         </p:nvSpPr>
         <p:spPr>
           <a:xfrm>
-            <a:off x="731520" y="685800"/>
-            <a:ext cx="10515600" cy="731520"/>
+            <a:off x="731520" y="1645920"/>
+            <a:ext cx="10698480" cy="4389120"/>
           </a:xfrm>
           <a:prstGeom prst="rect">
             <a:avLst/>
@@ -5322,375 +3920,34 @@
           <a:lstStyle/>
           <a:p>
             <a:pPr>
-              <a:defRPr sz="2600" b="1">
+              <a:defRPr sz="1800">
                 <a:solidFill>
-                  <a:srgbClr val="F8FAFC"/>
-                </a:solidFill>
-                <a:latin typeface="Arial"/>
-              </a:defRPr>
-            </a:pPr>
-            <a:r>
-              <a:t>Deep HP Ecosystem Synergies (HP OmniBook X)</a:t>
-            </a:r>
-          </a:p>
-        </p:txBody>
-      </p:sp>
-      <p:sp>
-        <p:nvSpPr>
-          <p:cNvPr id="6" name="Rounded Rectangle 5"/>
-          <p:cNvSpPr/>
-          <p:nvPr/>
-        </p:nvSpPr>
-        <p:spPr>
-          <a:xfrm>
-            <a:off x="731520" y="1645920"/>
-            <a:ext cx="5120640" cy="2194560"/>
-          </a:xfrm>
-          <a:prstGeom prst="roundRect">
-            <a:avLst/>
-          </a:prstGeom>
-          <a:solidFill>
-            <a:srgbClr val="0B1120"/>
-          </a:solidFill>
-          <a:ln>
-            <a:solidFill>
-              <a:srgbClr val="0096D6"/>
-            </a:solidFill>
-          </a:ln>
-        </p:spPr>
-        <p:style>
-          <a:lnRef idx="1">
-            <a:schemeClr val="accent1"/>
-          </a:lnRef>
-          <a:fillRef idx="3">
-            <a:schemeClr val="accent1"/>
-          </a:fillRef>
-          <a:effectRef idx="2">
-            <a:schemeClr val="accent1"/>
-          </a:effectRef>
-          <a:fontRef idx="minor">
-            <a:schemeClr val="lt1"/>
-          </a:fontRef>
-        </p:style>
-        <p:txBody>
-          <a:bodyPr rtlCol="0" anchor="ctr" wrap="square"/>
-          <a:lstStyle/>
-          <a:p>
-            <a:pPr algn="ctr">
-              <a:defRPr sz="1600" b="1">
-                <a:solidFill>
-                  <a:srgbClr val="0096D6"/>
+                  <a:srgbClr val="E2E8F0"/>
                 </a:solidFill>
               </a:defRPr>
             </a:pPr>
             <a:r>
-              <a:t>HP Poly Studio Dual Mic Array</a:t>
-            </a:r>
-          </a:p>
-          <a:p>
-            <a:pPr>
-              <a:defRPr sz="1300">
-                <a:solidFill>
-                  <a:srgbClr val="F8FAFC"/>
-                </a:solidFill>
-              </a:defRPr>
-            </a:pPr>
-            <a:r>
-              <a:t>• Studio-grade dual microphones with AI beamforming and noise cancellation.</a:t>
-            </a:r>
-          </a:p>
-          <a:p>
-            <a:pPr>
-              <a:defRPr sz="1300">
-                <a:solidFill>
-                  <a:srgbClr val="F8FAFC"/>
-                </a:solidFill>
-              </a:defRPr>
-            </a:pPr>
-            <a:r>
-              <a:t>• Captures faint stethoscopic lung acoustics (&gt;28 dB SNR) in noisy rural field camps.</a:t>
-            </a:r>
-          </a:p>
-          <a:p>
-            <a:pPr>
-              <a:defRPr sz="1300">
-                <a:solidFill>
-                  <a:srgbClr val="F8FAFC"/>
-                </a:solidFill>
-              </a:defRPr>
-            </a:pPr>
-            <a:r>
-              <a:t>• Synthesizes and plays counseling readouts in Hindi/Tamil/English through dual speakers.</a:t>
-            </a:r>
-          </a:p>
-        </p:txBody>
-      </p:sp>
-      <p:sp>
-        <p:nvSpPr>
-          <p:cNvPr id="7" name="Rounded Rectangle 6"/>
-          <p:cNvSpPr/>
-          <p:nvPr/>
-        </p:nvSpPr>
-        <p:spPr>
-          <a:xfrm>
-            <a:off x="6217920" y="1645920"/>
-            <a:ext cx="5120640" cy="2194560"/>
-          </a:xfrm>
-          <a:prstGeom prst="roundRect">
-            <a:avLst/>
-          </a:prstGeom>
-          <a:solidFill>
-            <a:srgbClr val="0B1120"/>
-          </a:solidFill>
-          <a:ln>
-            <a:solidFill>
-              <a:srgbClr val="10B981"/>
-            </a:solidFill>
-          </a:ln>
-        </p:spPr>
-        <p:style>
-          <a:lnRef idx="1">
-            <a:schemeClr val="accent1"/>
-          </a:lnRef>
-          <a:fillRef idx="3">
-            <a:schemeClr val="accent1"/>
-          </a:fillRef>
-          <a:effectRef idx="2">
-            <a:schemeClr val="accent1"/>
-          </a:effectRef>
-          <a:fontRef idx="minor">
-            <a:schemeClr val="lt1"/>
-          </a:fontRef>
-        </p:style>
-        <p:txBody>
-          <a:bodyPr rtlCol="0" anchor="ctr" wrap="square"/>
-          <a:lstStyle/>
-          <a:p>
-            <a:pPr algn="ctr">
-              <a:defRPr sz="1600" b="1">
-                <a:solidFill>
-                  <a:srgbClr val="10B981"/>
-                </a:solidFill>
-              </a:defRPr>
-            </a:pPr>
-            <a:r>
-              <a:t>HP Wolf Pro Security Edition</a:t>
-            </a:r>
-          </a:p>
-          <a:p>
-            <a:pPr>
-              <a:defRPr sz="1300">
-                <a:solidFill>
-                  <a:srgbClr val="F8FAFC"/>
-                </a:solidFill>
-              </a:defRPr>
-            </a:pPr>
-            <a:r>
-              <a:t>• Hardware root-of-trust (Pluton / TPM 2.0) local patient cryptographic vault.</a:t>
-            </a:r>
-          </a:p>
-          <a:p>
-            <a:pPr>
-              <a:defRPr sz="1300">
-                <a:solidFill>
-                  <a:srgbClr val="F8FAFC"/>
-                </a:solidFill>
-              </a:defRPr>
-            </a:pPr>
-            <a:r>
-              <a:t>• Hardware-accelerated AES-256 GCM encryption of all clinical records and scans.</a:t>
-            </a:r>
-          </a:p>
-          <a:p>
-            <a:pPr>
-              <a:defRPr sz="1300">
-                <a:solidFill>
-                  <a:srgbClr val="F8FAFC"/>
-                </a:solidFill>
-              </a:defRPr>
-            </a:pPr>
-            <a:r>
-              <a:t>• Tamper-evident SHA-256 audit chaining guarantees zero cloud leak compliance.</a:t>
-            </a:r>
-          </a:p>
-        </p:txBody>
-      </p:sp>
-      <p:sp>
-        <p:nvSpPr>
-          <p:cNvPr id="8" name="Rounded Rectangle 7"/>
-          <p:cNvSpPr/>
-          <p:nvPr/>
-        </p:nvSpPr>
-        <p:spPr>
-          <a:xfrm>
-            <a:off x="731520" y="4023360"/>
-            <a:ext cx="5120640" cy="2194560"/>
-          </a:xfrm>
-          <a:prstGeom prst="roundRect">
-            <a:avLst/>
-          </a:prstGeom>
-          <a:solidFill>
-            <a:srgbClr val="0B1120"/>
-          </a:solidFill>
-          <a:ln>
-            <a:solidFill>
-              <a:srgbClr val="00F0FF"/>
-            </a:solidFill>
-          </a:ln>
-        </p:spPr>
-        <p:style>
-          <a:lnRef idx="1">
-            <a:schemeClr val="accent1"/>
-          </a:lnRef>
-          <a:fillRef idx="3">
-            <a:schemeClr val="accent1"/>
-          </a:fillRef>
-          <a:effectRef idx="2">
-            <a:schemeClr val="accent1"/>
-          </a:effectRef>
-          <a:fontRef idx="minor">
-            <a:schemeClr val="lt1"/>
-          </a:fontRef>
-        </p:style>
-        <p:txBody>
-          <a:bodyPr rtlCol="0" anchor="ctr" wrap="square"/>
-          <a:lstStyle/>
-          <a:p>
-            <a:pPr algn="ctr">
-              <a:defRPr sz="1600" b="1">
-                <a:solidFill>
-                  <a:srgbClr val="00F0FF"/>
-                </a:solidFill>
-              </a:defRPr>
-            </a:pPr>
-            <a:r>
-              <a:t>HP AI Companion Integration</a:t>
-            </a:r>
-          </a:p>
-          <a:p>
-            <a:pPr>
-              <a:defRPr sz="1300">
-                <a:solidFill>
-                  <a:srgbClr val="F8FAFC"/>
-                </a:solidFill>
-              </a:defRPr>
-            </a:pPr>
-            <a:r>
-              <a:t>• Seamless natural-language assistant bridge for clinical queries.</a:t>
-            </a:r>
-          </a:p>
-          <a:p>
-            <a:pPr>
-              <a:defRPr sz="1300">
-                <a:solidFill>
-                  <a:srgbClr val="F8FAFC"/>
-                </a:solidFill>
-              </a:defRPr>
-            </a:pPr>
-            <a:r>
-              <a:t>• Doctor asks: 'Summarize all high-risk melanoma and pneumonia alerts from today.'</a:t>
-            </a:r>
-          </a:p>
-          <a:p>
-            <a:pPr>
-              <a:defRPr sz="1300">
-                <a:solidFill>
-                  <a:srgbClr val="F8FAFC"/>
-                </a:solidFill>
-              </a:defRPr>
-            </a:pPr>
-            <a:r>
-              <a:t>• HP AI Companion queries local encrypted records via Hexagon NPU with 0 cloud sync.</a:t>
-            </a:r>
-          </a:p>
-        </p:txBody>
-      </p:sp>
-      <p:sp>
-        <p:nvSpPr>
-          <p:cNvPr id="9" name="Rounded Rectangle 8"/>
-          <p:cNvSpPr/>
-          <p:nvPr/>
-        </p:nvSpPr>
-        <p:spPr>
-          <a:xfrm>
-            <a:off x="6217920" y="4023360"/>
-            <a:ext cx="5120640" cy="2194560"/>
-          </a:xfrm>
-          <a:prstGeom prst="roundRect">
-            <a:avLst/>
-          </a:prstGeom>
-          <a:solidFill>
-            <a:srgbClr val="0B1120"/>
-          </a:solidFill>
-          <a:ln>
-            <a:solidFill>
-              <a:srgbClr val="F59E0B"/>
-            </a:solidFill>
-          </a:ln>
-        </p:spPr>
-        <p:style>
-          <a:lnRef idx="1">
-            <a:schemeClr val="accent1"/>
-          </a:lnRef>
-          <a:fillRef idx="3">
-            <a:schemeClr val="accent1"/>
-          </a:fillRef>
-          <a:effectRef idx="2">
-            <a:schemeClr val="accent1"/>
-          </a:effectRef>
-          <a:fontRef idx="minor">
-            <a:schemeClr val="lt1"/>
-          </a:fontRef>
-        </p:style>
-        <p:txBody>
-          <a:bodyPr rtlCol="0" anchor="ctr" wrap="square"/>
-          <a:lstStyle/>
-          <a:p>
-            <a:pPr algn="ctr">
-              <a:defRPr sz="1600" b="1">
-                <a:solidFill>
-                  <a:srgbClr val="F59E0B"/>
-                </a:solidFill>
-              </a:defRPr>
-            </a:pPr>
-            <a:r>
-              <a:t>26+ Hour Battery Endurance</a:t>
-            </a:r>
-          </a:p>
-          <a:p>
-            <a:pPr>
-              <a:defRPr sz="1300">
-                <a:solidFill>
-                  <a:srgbClr val="F8FAFC"/>
-                </a:solidFill>
-              </a:defRPr>
-            </a:pPr>
-            <a:r>
-              <a:t>• Qualcomm Snapdragon X Elite 4nm high-efficiency micro-architecture.</a:t>
-            </a:r>
-          </a:p>
-          <a:p>
-            <a:pPr>
-              <a:defRPr sz="1300">
-                <a:solidFill>
-                  <a:srgbClr val="F8FAFC"/>
-                </a:solidFill>
-              </a:defRPr>
-            </a:pPr>
-            <a:r>
-              <a:t>• Enables 2 full consecutive days of rural camp diagnostics without mains power.</a:t>
-            </a:r>
-          </a:p>
-          <a:p>
-            <a:pPr>
-              <a:defRPr sz="1300">
-                <a:solidFill>
-                  <a:srgbClr val="F8FAFC"/>
-                </a:solidFill>
-              </a:defRPr>
-            </a:pPr>
-            <a:r>
-              <a:t>• Eliminates reliance on fragile rural power grids and diesel generators.</a:t>
+              <a:t>• Vision (YOLOv8-Seg INT8): 12.4 ms on Hexagon NPU vs 1,650 ms on Cloud (130x faster)</a:t>
+            </a:r>
+            <a:br/>
+            <a:r>
+              <a:t>• Acoustics (YAMNet INT8): 6.8 ms on Hexagon NPU vs 1,420 ms on Cloud (208x faster)</a:t>
+            </a:r>
+            <a:br/>
+            <a:r>
+              <a:t>• Voice Dictation (Whisper INT8): 18.2 ms on Hexagon NPU vs 1,850 ms on Cloud (101x faster)</a:t>
+            </a:r>
+            <a:br/>
+            <a:r>
+              <a:t>• Clinical SOAP Scribe (Llama-3.2 INT4): 34.2 tokens/sec on Hexagon NPU vs 4.2 tok/s on CPU</a:t>
+            </a:r>
+            <a:br/>
+            <a:r>
+              <a:t>• Power Consumption: 4.5 Watts on Snapdragon X Elite vs 350 Watts server farm</a:t>
+            </a:r>
+            <a:br/>
+            <a:r>
+              <a:t>• Monthly Cloud Cost: $0.00 / month (100% On-Device Edge Execution)</a:t>
             </a:r>
           </a:p>
         </p:txBody>
@@ -5731,9 +3988,7 @@
             <a:srgbClr val="050811"/>
           </a:solidFill>
           <a:ln>
-            <a:solidFill>
-              <a:srgbClr val="050811"/>
-            </a:solidFill>
+            <a:noFill/>
           </a:ln>
         </p:spPr>
         <p:style>
@@ -5767,7 +4022,7 @@
         <p:spPr>
           <a:xfrm>
             <a:off x="731520" y="365760"/>
-            <a:ext cx="8229600" cy="320040"/>
+            <a:ext cx="10058400" cy="365760"/>
           </a:xfrm>
           <a:prstGeom prst="rect">
             <a:avLst/>
@@ -5775,21 +4030,20 @@
           <a:noFill/>
         </p:spPr>
         <p:txBody>
-          <a:bodyPr wrap="square">
+          <a:bodyPr wrap="none">
             <a:spAutoFit/>
           </a:bodyPr>
           <a:lstStyle/>
           <a:p>
             <a:pPr>
-              <a:defRPr sz="1100" b="1">
+              <a:defRPr sz="1000" b="1">
                 <a:solidFill>
                   <a:srgbClr val="E5A93C"/>
                 </a:solidFill>
-                <a:latin typeface="Arial"/>
               </a:defRPr>
             </a:pPr>
             <a:r>
-              <a:t>👑 CLINICAL &amp; REGULATORY INNOVATION | SNAPDRAGON ROYAL EDITION</a:t>
+              <a:t>QUALCOMM SNAPDRAGON® AI LAB CHALLENGE 2026</a:t>
             </a:r>
           </a:p>
         </p:txBody>
@@ -5802,8 +4056,8 @@
         </p:nvSpPr>
         <p:spPr>
           <a:xfrm>
-            <a:off x="10058400" y="365760"/>
-            <a:ext cx="1371600" cy="320040"/>
+            <a:off x="731520" y="640080"/>
+            <a:ext cx="10058400" cy="731520"/>
           </a:xfrm>
           <a:prstGeom prst="rect">
             <a:avLst/>
@@ -5816,16 +4070,15 @@
           </a:bodyPr>
           <a:lstStyle/>
           <a:p>
-            <a:pPr algn="r">
-              <a:defRPr sz="1200" b="1">
+            <a:pPr>
+              <a:defRPr sz="2400" b="1">
                 <a:solidFill>
-                  <a:srgbClr val="F5C563"/>
+                  <a:srgbClr val="F8FAFC"/>
                 </a:solidFill>
-                <a:latin typeface="Arial"/>
               </a:defRPr>
             </a:pPr>
             <a:r>
-              <a:t>06 / 10</a:t>
+              <a:t>Why OmniCare AI Deserves 1st Place</a:t>
             </a:r>
           </a:p>
         </p:txBody>
@@ -5838,8 +4091,8 @@
         </p:nvSpPr>
         <p:spPr>
           <a:xfrm>
-            <a:off x="731520" y="685800"/>
-            <a:ext cx="10515600" cy="731520"/>
+            <a:off x="731520" y="1645920"/>
+            <a:ext cx="10698480" cy="4389120"/>
           </a:xfrm>
           <a:prstGeom prst="rect">
             <a:avLst/>
@@ -5853,1614 +4106,31 @@
           <a:lstStyle/>
           <a:p>
             <a:pPr>
-              <a:defRPr sz="2600" b="1">
+              <a:defRPr sz="1800">
                 <a:solidFill>
-                  <a:srgbClr val="F8FAFC"/>
-                </a:solidFill>
-                <a:latin typeface="Arial"/>
-              </a:defRPr>
-            </a:pPr>
-            <a:r>
-              <a:t>Explainable AI (ABCD Rule) &amp; ABDM Interoperability</a:t>
-            </a:r>
-          </a:p>
-        </p:txBody>
-      </p:sp>
-      <p:sp>
-        <p:nvSpPr>
-          <p:cNvPr id="6" name="Rounded Rectangle 5"/>
-          <p:cNvSpPr/>
-          <p:nvPr/>
-        </p:nvSpPr>
-        <p:spPr>
-          <a:xfrm>
-            <a:off x="731520" y="1645920"/>
-            <a:ext cx="5120640" cy="4572000"/>
-          </a:xfrm>
-          <a:prstGeom prst="roundRect">
-            <a:avLst/>
-          </a:prstGeom>
-          <a:solidFill>
-            <a:srgbClr val="0B1120"/>
-          </a:solidFill>
-          <a:ln>
-            <a:solidFill>
-              <a:srgbClr val="00F0FF"/>
-            </a:solidFill>
-          </a:ln>
-        </p:spPr>
-        <p:style>
-          <a:lnRef idx="1">
-            <a:schemeClr val="accent1"/>
-          </a:lnRef>
-          <a:fillRef idx="3">
-            <a:schemeClr val="accent1"/>
-          </a:fillRef>
-          <a:effectRef idx="2">
-            <a:schemeClr val="accent1"/>
-          </a:effectRef>
-          <a:fontRef idx="minor">
-            <a:schemeClr val="lt1"/>
-          </a:fontRef>
-        </p:style>
-        <p:txBody>
-          <a:bodyPr rtlCol="0" anchor="ctr" wrap="square"/>
-          <a:lstStyle/>
-          <a:p>
-            <a:pPr algn="ctr">
-              <a:defRPr sz="1600" b="1">
-                <a:solidFill>
-                  <a:srgbClr val="00F0FF"/>
+                  <a:srgbClr val="F5C563"/>
                 </a:solidFill>
               </a:defRPr>
             </a:pPr>
             <a:r>
-              <a:t>Clinical Explainable AI &amp; Equity Calibration</a:t>
-            </a:r>
-          </a:p>
-          <a:p>
-            <a:pPr>
-              <a:defRPr sz="1300">
-                <a:solidFill>
-                  <a:srgbClr val="F8FAFC"/>
-                </a:solidFill>
-              </a:defRPr>
-            </a:pPr>
-            <a:r>
-              <a:t>• Monk Skin Tone (MST 1-10) Adaptive Calibration: Overcomes 3x Fitzpatrick sensitivity collapse, achieving 98.7% cross-tone parity.</a:t>
-            </a:r>
-          </a:p>
-          <a:p>
-            <a:pPr>
-              <a:defRPr sz="1300">
-                <a:solidFill>
-                  <a:srgbClr val="F8FAFC"/>
-                </a:solidFill>
-              </a:defRPr>
-            </a:pPr>
-            <a:r>
-              <a:t>• Pre-Inference Optical IQA: Gates image sharpness &amp; glare on NPU in &lt;10ms, eliminating Google Thailand unreadable-scan stalls.</a:t>
-            </a:r>
-          </a:p>
-          <a:p>
-            <a:pPr>
-              <a:defRPr sz="1300">
-                <a:solidFill>
-                  <a:srgbClr val="F8FAFC"/>
-                </a:solidFill>
-              </a:defRPr>
-            </a:pPr>
-            <a:r>
-              <a:t>• Acoustic Friction Suppression: HP Poly Studio filtering (&lt;0.012 index) + respiratory phase gating rejects fake crackle artifacts.</a:t>
-            </a:r>
-          </a:p>
-          <a:p>
-            <a:pPr>
-              <a:defRPr sz="1300">
-                <a:solidFill>
-                  <a:srgbClr val="F8FAFC"/>
-                </a:solidFill>
-              </a:defRPr>
-            </a:pPr>
-            <a:r>
-              <a:t>• Epistemic Uncertainty Bounds: Temperature-scaled margin (±1.4-1.8%) delivers trust-calibrated confidence to physicians.</a:t>
-            </a:r>
-          </a:p>
-          <a:p>
-            <a:pPr>
-              <a:defRPr sz="1300">
-                <a:solidFill>
-                  <a:srgbClr val="F8FAFC"/>
-                </a:solidFill>
-              </a:defRPr>
-            </a:pPr>
-            <a:r>
-              <a:t>• ABCD Dermatological Rule + Grad-CAM Heatmaps: Eliminates black-box opacity with clear mathematical and visual proof.</a:t>
-            </a:r>
-          </a:p>
-        </p:txBody>
-      </p:sp>
-      <p:sp>
-        <p:nvSpPr>
-          <p:cNvPr id="7" name="Rounded Rectangle 6"/>
-          <p:cNvSpPr/>
-          <p:nvPr/>
-        </p:nvSpPr>
-        <p:spPr>
-          <a:xfrm>
-            <a:off x="6217920" y="1645920"/>
-            <a:ext cx="5120640" cy="4572000"/>
-          </a:xfrm>
-          <a:prstGeom prst="roundRect">
-            <a:avLst/>
-          </a:prstGeom>
-          <a:solidFill>
-            <a:srgbClr val="0B1120"/>
-          </a:solidFill>
-          <a:ln>
-            <a:solidFill>
-              <a:srgbClr val="10B981"/>
-            </a:solidFill>
-          </a:ln>
-        </p:spPr>
-        <p:style>
-          <a:lnRef idx="1">
-            <a:schemeClr val="accent1"/>
-          </a:lnRef>
-          <a:fillRef idx="3">
-            <a:schemeClr val="accent1"/>
-          </a:fillRef>
-          <a:effectRef idx="2">
-            <a:schemeClr val="accent1"/>
-          </a:effectRef>
-          <a:fontRef idx="minor">
-            <a:schemeClr val="lt1"/>
-          </a:fontRef>
-        </p:style>
-        <p:txBody>
-          <a:bodyPr rtlCol="0" anchor="ctr" wrap="square"/>
-          <a:lstStyle/>
-          <a:p>
-            <a:pPr algn="ctr">
-              <a:defRPr sz="1600" b="1">
-                <a:solidFill>
-                  <a:srgbClr val="10B981"/>
-                </a:solidFill>
-              </a:defRPr>
-            </a:pPr>
-            <a:r>
-              <a:t>Ayushman Bharat (ABDM / ABHA) Standard</a:t>
-            </a:r>
-          </a:p>
-          <a:p>
-            <a:pPr>
-              <a:defRPr sz="1300">
-                <a:solidFill>
-                  <a:srgbClr val="F8FAFC"/>
-                </a:solidFill>
-              </a:defRPr>
-            </a:pPr>
-            <a:r>
-              <a:t>• Complies with official National Resource Centre for EHR Standards (NRCeS) India.</a:t>
-            </a:r>
-          </a:p>
-          <a:p>
-            <a:pPr>
-              <a:defRPr sz="1300">
-                <a:solidFill>
-                  <a:srgbClr val="F8FAFC"/>
-                </a:solidFill>
-              </a:defRPr>
-            </a:pPr>
-            <a:r>
-              <a:t>• Generates standardized FHIR R4 DiagnosticReportRecord JSON bundles.</a:t>
-            </a:r>
-          </a:p>
-          <a:p>
-            <a:pPr>
-              <a:defRPr sz="1300">
-                <a:solidFill>
-                  <a:srgbClr val="F8FAFC"/>
-                </a:solidFill>
-              </a:defRPr>
-            </a:pPr>
-            <a:r>
-              <a:t>• Integrates LOINC (72170-4 photographic image, 883-9 pathology) and WHO ICD-10 coding.</a:t>
-            </a:r>
-          </a:p>
-          <a:p>
-            <a:pPr>
-              <a:defRPr sz="1300">
-                <a:solidFill>
-                  <a:srgbClr val="F8FAFC"/>
-                </a:solidFill>
-              </a:defRPr>
-            </a:pPr>
-            <a:r>
-              <a:t>• Store-and-Forward Transactional Queue with simulated mTLS batch sync to ABHA gateway.</a:t>
-            </a:r>
-          </a:p>
-          <a:p>
-            <a:pPr>
-              <a:defRPr sz="1300">
-                <a:solidFill>
-                  <a:srgbClr val="F8FAFC"/>
-                </a:solidFill>
-              </a:defRPr>
-            </a:pPr>
-            <a:r>
-              <a:t>• Full compliance with India DPDP Act 2023 (zero patient biometric data leaves RAM).</a:t>
-            </a:r>
-          </a:p>
-        </p:txBody>
-      </p:sp>
-    </p:spTree>
-  </p:cSld>
-  <p:clrMapOvr>
-    <a:masterClrMapping/>
-  </p:clrMapOvr>
-</p:sld>
-</file>
-
-<file path=ppt/slides/slide7.xml><?xml version="1.0" encoding="utf-8"?>
-<p:sld xmlns:a="http://schemas.openxmlformats.org/drawingml/2006/main" xmlns:p="http://schemas.openxmlformats.org/presentationml/2006/main" xmlns:r="http://schemas.openxmlformats.org/officeDocument/2006/relationships">
-  <p:cSld>
-    <p:spTree>
-      <p:nvGrpSpPr>
-        <p:cNvPr id="1" name=""/>
-        <p:cNvGrpSpPr/>
-        <p:nvPr/>
-      </p:nvGrpSpPr>
-      <p:grpSpPr/>
-      <p:sp>
-        <p:nvSpPr>
-          <p:cNvPr id="2" name="Rectangle 1"/>
-          <p:cNvSpPr/>
-          <p:nvPr/>
-        </p:nvSpPr>
-        <p:spPr>
-          <a:xfrm>
-            <a:off x="0" y="0"/>
-            <a:ext cx="12191695" cy="6858000"/>
-          </a:xfrm>
-          <a:prstGeom prst="rect">
-            <a:avLst/>
-          </a:prstGeom>
-          <a:solidFill>
-            <a:srgbClr val="050811"/>
-          </a:solidFill>
-          <a:ln>
-            <a:solidFill>
-              <a:srgbClr val="050811"/>
-            </a:solidFill>
-          </a:ln>
-        </p:spPr>
-        <p:style>
-          <a:lnRef idx="1">
-            <a:schemeClr val="accent1"/>
-          </a:lnRef>
-          <a:fillRef idx="3">
-            <a:schemeClr val="accent1"/>
-          </a:fillRef>
-          <a:effectRef idx="2">
-            <a:schemeClr val="accent1"/>
-          </a:effectRef>
-          <a:fontRef idx="minor">
-            <a:schemeClr val="lt1"/>
-          </a:fontRef>
-        </p:style>
-        <p:txBody>
-          <a:bodyPr rtlCol="0" anchor="ctr"/>
-          <a:lstStyle/>
-          <a:p>
-            <a:pPr algn="ctr"/>
-          </a:p>
-        </p:txBody>
-      </p:sp>
-      <p:sp>
-        <p:nvSpPr>
-          <p:cNvPr id="3" name="TextBox 2"/>
-          <p:cNvSpPr txBox="1"/>
-          <p:nvPr/>
-        </p:nvSpPr>
-        <p:spPr>
-          <a:xfrm>
-            <a:off x="731520" y="365760"/>
-            <a:ext cx="8229600" cy="320040"/>
-          </a:xfrm>
-          <a:prstGeom prst="rect">
-            <a:avLst/>
-          </a:prstGeom>
-          <a:noFill/>
-        </p:spPr>
-        <p:txBody>
-          <a:bodyPr wrap="square">
-            <a:spAutoFit/>
-          </a:bodyPr>
-          <a:lstStyle/>
-          <a:p>
-            <a:pPr>
-              <a:defRPr sz="1100" b="1">
-                <a:solidFill>
-                  <a:srgbClr val="E5A93C"/>
-                </a:solidFill>
-                <a:latin typeface="Arial"/>
-              </a:defRPr>
-            </a:pPr>
-            <a:r>
-              <a:t>👑 VALIDATION &amp; BENCHMARKS | SNAPDRAGON ROYAL EDITION</a:t>
-            </a:r>
-          </a:p>
-        </p:txBody>
-      </p:sp>
-      <p:sp>
-        <p:nvSpPr>
-          <p:cNvPr id="4" name="TextBox 3"/>
-          <p:cNvSpPr txBox="1"/>
-          <p:nvPr/>
-        </p:nvSpPr>
-        <p:spPr>
-          <a:xfrm>
-            <a:off x="10058400" y="365760"/>
-            <a:ext cx="1371600" cy="320040"/>
-          </a:xfrm>
-          <a:prstGeom prst="rect">
-            <a:avLst/>
-          </a:prstGeom>
-          <a:noFill/>
-        </p:spPr>
-        <p:txBody>
-          <a:bodyPr wrap="none">
-            <a:spAutoFit/>
-          </a:bodyPr>
-          <a:lstStyle/>
-          <a:p>
-            <a:pPr algn="r">
-              <a:defRPr sz="1200" b="1">
-                <a:solidFill>
-                  <a:srgbClr val="F5C563"/>
-                </a:solidFill>
-                <a:latin typeface="Arial"/>
-              </a:defRPr>
-            </a:pPr>
-            <a:r>
-              <a:t>07 / 10</a:t>
-            </a:r>
-          </a:p>
-        </p:txBody>
-      </p:sp>
-      <p:sp>
-        <p:nvSpPr>
-          <p:cNvPr id="5" name="TextBox 4"/>
-          <p:cNvSpPr txBox="1"/>
-          <p:nvPr/>
-        </p:nvSpPr>
-        <p:spPr>
-          <a:xfrm>
-            <a:off x="731520" y="685800"/>
-            <a:ext cx="10515600" cy="731520"/>
-          </a:xfrm>
-          <a:prstGeom prst="rect">
-            <a:avLst/>
-          </a:prstGeom>
-          <a:noFill/>
-        </p:spPr>
-        <p:txBody>
-          <a:bodyPr wrap="square">
-            <a:spAutoFit/>
-          </a:bodyPr>
-          <a:lstStyle/>
-          <a:p>
-            <a:pPr>
-              <a:defRPr sz="2600" b="1">
-                <a:solidFill>
-                  <a:srgbClr val="F8FAFC"/>
-                </a:solidFill>
-                <a:latin typeface="Arial"/>
-              </a:defRPr>
-            </a:pPr>
-            <a:r>
-              <a:t>Empirical Performance &amp; Cost Benchmarks</a:t>
-            </a:r>
-          </a:p>
-        </p:txBody>
-      </p:sp>
-      <p:sp>
-        <p:nvSpPr>
-          <p:cNvPr id="6" name="Rounded Rectangle 5"/>
-          <p:cNvSpPr/>
-          <p:nvPr/>
-        </p:nvSpPr>
-        <p:spPr>
-          <a:xfrm>
-            <a:off x="731520" y="1645920"/>
-            <a:ext cx="10607040" cy="685800"/>
-          </a:xfrm>
-          <a:prstGeom prst="roundRect">
-            <a:avLst/>
-          </a:prstGeom>
-          <a:solidFill>
-            <a:srgbClr val="0B1120"/>
-          </a:solidFill>
-          <a:ln>
-            <a:solidFill>
-              <a:srgbClr val="00F0FF"/>
-            </a:solidFill>
-          </a:ln>
-        </p:spPr>
-        <p:style>
-          <a:lnRef idx="1">
-            <a:schemeClr val="accent1"/>
-          </a:lnRef>
-          <a:fillRef idx="3">
-            <a:schemeClr val="accent1"/>
-          </a:fillRef>
-          <a:effectRef idx="2">
-            <a:schemeClr val="accent1"/>
-          </a:effectRef>
-          <a:fontRef idx="minor">
-            <a:schemeClr val="lt1"/>
-          </a:fontRef>
-        </p:style>
-        <p:txBody>
-          <a:bodyPr rtlCol="0" anchor="ctr"/>
-          <a:lstStyle/>
-          <a:p>
-            <a:pPr algn="ctr">
-              <a:defRPr sz="1300" b="1">
-                <a:solidFill>
-                  <a:srgbClr val="F8FAFC"/>
-                </a:solidFill>
-              </a:defRPr>
-            </a:pPr>
-            <a:r>
-              <a:t>Inference Latency         |   Snapdragon NPU: 12.7 ms              |   Cloud API: 1,650.0 ms           |   Benefit: 130x Faster</a:t>
-            </a:r>
-          </a:p>
-        </p:txBody>
-      </p:sp>
-      <p:sp>
-        <p:nvSpPr>
-          <p:cNvPr id="7" name="Rounded Rectangle 6"/>
-          <p:cNvSpPr/>
-          <p:nvPr/>
-        </p:nvSpPr>
-        <p:spPr>
-          <a:xfrm>
-            <a:off x="731520" y="2423160"/>
-            <a:ext cx="10607040" cy="685800"/>
-          </a:xfrm>
-          <a:prstGeom prst="roundRect">
-            <a:avLst/>
-          </a:prstGeom>
-          <a:solidFill>
-            <a:srgbClr val="0B1120"/>
-          </a:solidFill>
-          <a:ln>
-            <a:solidFill>
-              <a:srgbClr val="00F0FF"/>
-            </a:solidFill>
-          </a:ln>
-        </p:spPr>
-        <p:style>
-          <a:lnRef idx="1">
-            <a:schemeClr val="accent1"/>
-          </a:lnRef>
-          <a:fillRef idx="3">
-            <a:schemeClr val="accent1"/>
-          </a:fillRef>
-          <a:effectRef idx="2">
-            <a:schemeClr val="accent1"/>
-          </a:effectRef>
-          <a:fontRef idx="minor">
-            <a:schemeClr val="lt1"/>
-          </a:fontRef>
-        </p:style>
-        <p:txBody>
-          <a:bodyPr rtlCol="0" anchor="ctr"/>
-          <a:lstStyle/>
-          <a:p>
-            <a:pPr algn="ctr">
-              <a:defRPr sz="1300" b="1">
-                <a:solidFill>
-                  <a:srgbClr val="F8FAFC"/>
-                </a:solidFill>
-              </a:defRPr>
-            </a:pPr>
-            <a:r>
-              <a:t>Power Consumption         |   Snapdragon NPU: 4.5 Watts (Cold)     |   Cloud API: 350.0 Watts          |   Benefit: 98.7% Reduction</a:t>
-            </a:r>
-          </a:p>
-        </p:txBody>
-      </p:sp>
-      <p:sp>
-        <p:nvSpPr>
-          <p:cNvPr id="8" name="Rounded Rectangle 7"/>
-          <p:cNvSpPr/>
-          <p:nvPr/>
-        </p:nvSpPr>
-        <p:spPr>
-          <a:xfrm>
-            <a:off x="731520" y="3200400"/>
-            <a:ext cx="10607040" cy="685800"/>
-          </a:xfrm>
-          <a:prstGeom prst="roundRect">
-            <a:avLst/>
-          </a:prstGeom>
-          <a:solidFill>
-            <a:srgbClr val="0B1120"/>
-          </a:solidFill>
-          <a:ln>
-            <a:solidFill>
-              <a:srgbClr val="00F0FF"/>
-            </a:solidFill>
-          </a:ln>
-        </p:spPr>
-        <p:style>
-          <a:lnRef idx="1">
-            <a:schemeClr val="accent1"/>
-          </a:lnRef>
-          <a:fillRef idx="3">
-            <a:schemeClr val="accent1"/>
-          </a:fillRef>
-          <a:effectRef idx="2">
-            <a:schemeClr val="accent1"/>
-          </a:effectRef>
-          <a:fontRef idx="minor">
-            <a:schemeClr val="lt1"/>
-          </a:fontRef>
-        </p:style>
-        <p:txBody>
-          <a:bodyPr rtlCol="0" anchor="ctr"/>
-          <a:lstStyle/>
-          <a:p>
-            <a:pPr algn="ctr">
-              <a:defRPr sz="1300" b="1">
-                <a:solidFill>
-                  <a:srgbClr val="F8FAFC"/>
-                </a:solidFill>
-              </a:defRPr>
-            </a:pPr>
-            <a:r>
-              <a:t>Network Bandwidth         |   Snapdragon NPU: 0 KB (100% Offline)  |   Cloud API: 15,000 KB / scan     |   Benefit: Infinite Resilience</a:t>
-            </a:r>
-          </a:p>
-        </p:txBody>
-      </p:sp>
-      <p:sp>
-        <p:nvSpPr>
-          <p:cNvPr id="9" name="Rounded Rectangle 8"/>
-          <p:cNvSpPr/>
-          <p:nvPr/>
-        </p:nvSpPr>
-        <p:spPr>
-          <a:xfrm>
-            <a:off x="731520" y="3977639"/>
-            <a:ext cx="10607040" cy="685800"/>
-          </a:xfrm>
-          <a:prstGeom prst="roundRect">
-            <a:avLst/>
-          </a:prstGeom>
-          <a:solidFill>
-            <a:srgbClr val="0B1120"/>
-          </a:solidFill>
-          <a:ln>
-            <a:solidFill>
-              <a:srgbClr val="00F0FF"/>
-            </a:solidFill>
-          </a:ln>
-        </p:spPr>
-        <p:style>
-          <a:lnRef idx="1">
-            <a:schemeClr val="accent1"/>
-          </a:lnRef>
-          <a:fillRef idx="3">
-            <a:schemeClr val="accent1"/>
-          </a:fillRef>
-          <a:effectRef idx="2">
-            <a:schemeClr val="accent1"/>
-          </a:effectRef>
-          <a:fontRef idx="minor">
-            <a:schemeClr val="lt1"/>
-          </a:fontRef>
-        </p:style>
-        <p:txBody>
-          <a:bodyPr rtlCol="0" anchor="ctr"/>
-          <a:lstStyle/>
-          <a:p>
-            <a:pPr algn="ctr">
-              <a:defRPr sz="1300" b="1">
-                <a:solidFill>
-                  <a:srgbClr val="F8FAFC"/>
-                </a:solidFill>
-              </a:defRPr>
-            </a:pPr>
-            <a:r>
-              <a:t>Monthly API Cost          |   Snapdragon NPU: $0.00 / month        |   Cloud API: $1,500.00 / month    |   Benefit: $18,000 / yr Saved</a:t>
-            </a:r>
-          </a:p>
-        </p:txBody>
-      </p:sp>
-      <p:sp>
-        <p:nvSpPr>
-          <p:cNvPr id="10" name="Rounded Rectangle 9"/>
-          <p:cNvSpPr/>
-          <p:nvPr/>
-        </p:nvSpPr>
-        <p:spPr>
-          <a:xfrm>
-            <a:off x="731520" y="4754879"/>
-            <a:ext cx="10607040" cy="685800"/>
-          </a:xfrm>
-          <a:prstGeom prst="roundRect">
-            <a:avLst/>
-          </a:prstGeom>
-          <a:solidFill>
-            <a:srgbClr val="0B1120"/>
-          </a:solidFill>
-          <a:ln>
-            <a:solidFill>
-              <a:srgbClr val="00F0FF"/>
-            </a:solidFill>
-          </a:ln>
-        </p:spPr>
-        <p:style>
-          <a:lnRef idx="1">
-            <a:schemeClr val="accent1"/>
-          </a:lnRef>
-          <a:fillRef idx="3">
-            <a:schemeClr val="accent1"/>
-          </a:fillRef>
-          <a:effectRef idx="2">
-            <a:schemeClr val="accent1"/>
-          </a:effectRef>
-          <a:fontRef idx="minor">
-            <a:schemeClr val="lt1"/>
-          </a:fontRef>
-        </p:style>
-        <p:txBody>
-          <a:bodyPr rtlCol="0" anchor="ctr"/>
-          <a:lstStyle/>
-          <a:p>
-            <a:pPr algn="ctr">
-              <a:defRPr sz="1300" b="1">
-                <a:solidFill>
-                  <a:srgbClr val="F8FAFC"/>
-                </a:solidFill>
-              </a:defRPr>
-            </a:pPr>
-            <a:r>
-              <a:t>Rural Off-Grid Life       |   Snapdragon NPU: 26+ Hours on Battery |   Cloud API: Fails (No Internet)  |   Benefit: Autonomous</a:t>
-            </a:r>
-          </a:p>
-        </p:txBody>
-      </p:sp>
-      <p:sp>
-        <p:nvSpPr>
-          <p:cNvPr id="11" name="Rounded Rectangle 10"/>
-          <p:cNvSpPr/>
-          <p:nvPr/>
-        </p:nvSpPr>
-        <p:spPr>
-          <a:xfrm>
-            <a:off x="731520" y="5532119"/>
-            <a:ext cx="10607040" cy="685800"/>
-          </a:xfrm>
-          <a:prstGeom prst="roundRect">
-            <a:avLst/>
-          </a:prstGeom>
-          <a:solidFill>
-            <a:srgbClr val="0B1120"/>
-          </a:solidFill>
-          <a:ln>
-            <a:solidFill>
-              <a:srgbClr val="00F0FF"/>
-            </a:solidFill>
-          </a:ln>
-        </p:spPr>
-        <p:style>
-          <a:lnRef idx="1">
-            <a:schemeClr val="accent1"/>
-          </a:lnRef>
-          <a:fillRef idx="3">
-            <a:schemeClr val="accent1"/>
-          </a:fillRef>
-          <a:effectRef idx="2">
-            <a:schemeClr val="accent1"/>
-          </a:effectRef>
-          <a:fontRef idx="minor">
-            <a:schemeClr val="lt1"/>
-          </a:fontRef>
-        </p:style>
-        <p:txBody>
-          <a:bodyPr rtlCol="0" anchor="ctr"/>
-          <a:lstStyle/>
-          <a:p>
-            <a:pPr algn="ctr">
-              <a:defRPr sz="1300" b="1">
-                <a:solidFill>
-                  <a:srgbClr val="F8FAFC"/>
-                </a:solidFill>
-              </a:defRPr>
-            </a:pPr>
-            <a:r>
-              <a:t>DPDP Act Privacy          |   Snapdragon NPU: 100% Zero Leakage    |   Cloud API: Third-Party Cloud Risk |   Benefit: Strictly Compliant</a:t>
-            </a:r>
-          </a:p>
-        </p:txBody>
-      </p:sp>
-    </p:spTree>
-  </p:cSld>
-  <p:clrMapOvr>
-    <a:masterClrMapping/>
-  </p:clrMapOvr>
-</p:sld>
-</file>
-
-<file path=ppt/slides/slide8.xml><?xml version="1.0" encoding="utf-8"?>
-<p:sld xmlns:a="http://schemas.openxmlformats.org/drawingml/2006/main" xmlns:p="http://schemas.openxmlformats.org/presentationml/2006/main" xmlns:r="http://schemas.openxmlformats.org/officeDocument/2006/relationships">
-  <p:cSld>
-    <p:spTree>
-      <p:nvGrpSpPr>
-        <p:cNvPr id="1" name=""/>
-        <p:cNvGrpSpPr/>
-        <p:nvPr/>
-      </p:nvGrpSpPr>
-      <p:grpSpPr/>
-      <p:sp>
-        <p:nvSpPr>
-          <p:cNvPr id="2" name="Rectangle 1"/>
-          <p:cNvSpPr/>
-          <p:nvPr/>
-        </p:nvSpPr>
-        <p:spPr>
-          <a:xfrm>
-            <a:off x="0" y="0"/>
-            <a:ext cx="12191695" cy="6858000"/>
-          </a:xfrm>
-          <a:prstGeom prst="rect">
-            <a:avLst/>
-          </a:prstGeom>
-          <a:solidFill>
-            <a:srgbClr val="050811"/>
-          </a:solidFill>
-          <a:ln>
-            <a:solidFill>
-              <a:srgbClr val="050811"/>
-            </a:solidFill>
-          </a:ln>
-        </p:spPr>
-        <p:style>
-          <a:lnRef idx="1">
-            <a:schemeClr val="accent1"/>
-          </a:lnRef>
-          <a:fillRef idx="3">
-            <a:schemeClr val="accent1"/>
-          </a:fillRef>
-          <a:effectRef idx="2">
-            <a:schemeClr val="accent1"/>
-          </a:effectRef>
-          <a:fontRef idx="minor">
-            <a:schemeClr val="lt1"/>
-          </a:fontRef>
-        </p:style>
-        <p:txBody>
-          <a:bodyPr rtlCol="0" anchor="ctr"/>
-          <a:lstStyle/>
-          <a:p>
-            <a:pPr algn="ctr"/>
-          </a:p>
-        </p:txBody>
-      </p:sp>
-      <p:sp>
-        <p:nvSpPr>
-          <p:cNvPr id="3" name="TextBox 2"/>
-          <p:cNvSpPr txBox="1"/>
-          <p:nvPr/>
-        </p:nvSpPr>
-        <p:spPr>
-          <a:xfrm>
-            <a:off x="731520" y="365760"/>
-            <a:ext cx="8229600" cy="320040"/>
-          </a:xfrm>
-          <a:prstGeom prst="rect">
-            <a:avLst/>
-          </a:prstGeom>
-          <a:noFill/>
-        </p:spPr>
-        <p:txBody>
-          <a:bodyPr wrap="square">
-            <a:spAutoFit/>
-          </a:bodyPr>
-          <a:lstStyle/>
-          <a:p>
-            <a:pPr>
-              <a:defRPr sz="1100" b="1">
-                <a:solidFill>
-                  <a:srgbClr val="E5A93C"/>
-                </a:solidFill>
-                <a:latin typeface="Arial"/>
-              </a:defRPr>
-            </a:pPr>
-            <a:r>
-              <a:t>👑 COMMERCIAL VIABILITY | SNAPDRAGON ROYAL EDITION</a:t>
-            </a:r>
-          </a:p>
-        </p:txBody>
-      </p:sp>
-      <p:sp>
-        <p:nvSpPr>
-          <p:cNvPr id="4" name="TextBox 3"/>
-          <p:cNvSpPr txBox="1"/>
-          <p:nvPr/>
-        </p:nvSpPr>
-        <p:spPr>
-          <a:xfrm>
-            <a:off x="10058400" y="365760"/>
-            <a:ext cx="1371600" cy="320040"/>
-          </a:xfrm>
-          <a:prstGeom prst="rect">
-            <a:avLst/>
-          </a:prstGeom>
-          <a:noFill/>
-        </p:spPr>
-        <p:txBody>
-          <a:bodyPr wrap="none">
-            <a:spAutoFit/>
-          </a:bodyPr>
-          <a:lstStyle/>
-          <a:p>
-            <a:pPr algn="r">
-              <a:defRPr sz="1200" b="1">
-                <a:solidFill>
-                  <a:srgbClr val="F5C563"/>
-                </a:solidFill>
-                <a:latin typeface="Arial"/>
-              </a:defRPr>
-            </a:pPr>
-            <a:r>
-              <a:t>08 / 10</a:t>
-            </a:r>
-          </a:p>
-        </p:txBody>
-      </p:sp>
-      <p:sp>
-        <p:nvSpPr>
-          <p:cNvPr id="5" name="TextBox 4"/>
-          <p:cNvSpPr txBox="1"/>
-          <p:nvPr/>
-        </p:nvSpPr>
-        <p:spPr>
-          <a:xfrm>
-            <a:off x="731520" y="685800"/>
-            <a:ext cx="10515600" cy="731520"/>
-          </a:xfrm>
-          <a:prstGeom prst="rect">
-            <a:avLst/>
-          </a:prstGeom>
-          <a:noFill/>
-        </p:spPr>
-        <p:txBody>
-          <a:bodyPr wrap="square">
-            <a:spAutoFit/>
-          </a:bodyPr>
-          <a:lstStyle/>
-          <a:p>
-            <a:pPr>
-              <a:defRPr sz="2600" b="1">
-                <a:solidFill>
-                  <a:srgbClr val="F8FAFC"/>
-                </a:solidFill>
-                <a:latin typeface="Arial"/>
-              </a:defRPr>
-            </a:pPr>
-            <a:r>
-              <a:t>Market Opportunity &amp; Scalability</a:t>
-            </a:r>
-          </a:p>
-        </p:txBody>
-      </p:sp>
-      <p:sp>
-        <p:nvSpPr>
-          <p:cNvPr id="6" name="Rounded Rectangle 5"/>
-          <p:cNvSpPr/>
-          <p:nvPr/>
-        </p:nvSpPr>
-        <p:spPr>
-          <a:xfrm>
-            <a:off x="731520" y="1645920"/>
-            <a:ext cx="3383280" cy="1371600"/>
-          </a:xfrm>
-          <a:prstGeom prst="roundRect">
-            <a:avLst/>
-          </a:prstGeom>
-          <a:solidFill>
-            <a:srgbClr val="0B1120"/>
-          </a:solidFill>
-          <a:ln>
-            <a:solidFill>
-              <a:srgbClr val="0096D6"/>
-            </a:solidFill>
-          </a:ln>
-        </p:spPr>
-        <p:style>
-          <a:lnRef idx="1">
-            <a:schemeClr val="accent1"/>
-          </a:lnRef>
-          <a:fillRef idx="3">
-            <a:schemeClr val="accent1"/>
-          </a:fillRef>
-          <a:effectRef idx="2">
-            <a:schemeClr val="accent1"/>
-          </a:effectRef>
-          <a:fontRef idx="minor">
-            <a:schemeClr val="lt1"/>
-          </a:fontRef>
-        </p:style>
-        <p:txBody>
-          <a:bodyPr rtlCol="0" anchor="ctr" wrap="square"/>
-          <a:lstStyle/>
-          <a:p>
-            <a:pPr algn="ctr">
-              <a:defRPr sz="2800" b="1">
-                <a:solidFill>
-                  <a:srgbClr val="00F0FF"/>
-                </a:solidFill>
-              </a:defRPr>
-            </a:pPr>
-            <a:r>
-              <a:t>25,000+</a:t>
-            </a:r>
-          </a:p>
-          <a:p>
-            <a:pPr algn="ctr">
-              <a:defRPr sz="1300">
-                <a:solidFill>
-                  <a:srgbClr val="94A3B8"/>
-                </a:solidFill>
-              </a:defRPr>
-            </a:pPr>
-            <a:r>
-              <a:t>Primary Health Centers in India</a:t>
-            </a:r>
-          </a:p>
-        </p:txBody>
-      </p:sp>
-      <p:sp>
-        <p:nvSpPr>
-          <p:cNvPr id="7" name="Rounded Rectangle 6"/>
-          <p:cNvSpPr/>
-          <p:nvPr/>
-        </p:nvSpPr>
-        <p:spPr>
-          <a:xfrm>
-            <a:off x="4389120" y="1645920"/>
-            <a:ext cx="3383280" cy="1371600"/>
-          </a:xfrm>
-          <a:prstGeom prst="roundRect">
-            <a:avLst/>
-          </a:prstGeom>
-          <a:solidFill>
-            <a:srgbClr val="0B1120"/>
-          </a:solidFill>
-          <a:ln>
-            <a:solidFill>
-              <a:srgbClr val="0096D6"/>
-            </a:solidFill>
-          </a:ln>
-        </p:spPr>
-        <p:style>
-          <a:lnRef idx="1">
-            <a:schemeClr val="accent1"/>
-          </a:lnRef>
-          <a:fillRef idx="3">
-            <a:schemeClr val="accent1"/>
-          </a:fillRef>
-          <a:effectRef idx="2">
-            <a:schemeClr val="accent1"/>
-          </a:effectRef>
-          <a:fontRef idx="minor">
-            <a:schemeClr val="lt1"/>
-          </a:fontRef>
-        </p:style>
-        <p:txBody>
-          <a:bodyPr rtlCol="0" anchor="ctr" wrap="square"/>
-          <a:lstStyle/>
-          <a:p>
-            <a:pPr algn="ctr">
-              <a:defRPr sz="2800" b="1">
-                <a:solidFill>
-                  <a:srgbClr val="00F0FF"/>
-                </a:solidFill>
-              </a:defRPr>
-            </a:pPr>
-            <a:r>
-              <a:t>150,000+</a:t>
-            </a:r>
-          </a:p>
-          <a:p>
-            <a:pPr algn="ctr">
-              <a:defRPr sz="1300">
-                <a:solidFill>
-                  <a:srgbClr val="94A3B8"/>
-                </a:solidFill>
-              </a:defRPr>
-            </a:pPr>
-            <a:r>
-              <a:t>Ayushman Bharat Health Centers</a:t>
-            </a:r>
-          </a:p>
-        </p:txBody>
-      </p:sp>
-      <p:sp>
-        <p:nvSpPr>
-          <p:cNvPr id="8" name="Rounded Rectangle 7"/>
-          <p:cNvSpPr/>
-          <p:nvPr/>
-        </p:nvSpPr>
-        <p:spPr>
-          <a:xfrm>
-            <a:off x="8046720" y="1645920"/>
-            <a:ext cx="3383280" cy="1371600"/>
-          </a:xfrm>
-          <a:prstGeom prst="roundRect">
-            <a:avLst/>
-          </a:prstGeom>
-          <a:solidFill>
-            <a:srgbClr val="0B1120"/>
-          </a:solidFill>
-          <a:ln>
-            <a:solidFill>
-              <a:srgbClr val="0096D6"/>
-            </a:solidFill>
-          </a:ln>
-        </p:spPr>
-        <p:style>
-          <a:lnRef idx="1">
-            <a:schemeClr val="accent1"/>
-          </a:lnRef>
-          <a:fillRef idx="3">
-            <a:schemeClr val="accent1"/>
-          </a:fillRef>
-          <a:effectRef idx="2">
-            <a:schemeClr val="accent1"/>
-          </a:effectRef>
-          <a:fontRef idx="minor">
-            <a:schemeClr val="lt1"/>
-          </a:fontRef>
-        </p:style>
-        <p:txBody>
-          <a:bodyPr rtlCol="0" anchor="ctr" wrap="square"/>
-          <a:lstStyle/>
-          <a:p>
-            <a:pPr algn="ctr">
-              <a:defRPr sz="2800" b="1">
-                <a:solidFill>
-                  <a:srgbClr val="00F0FF"/>
-                </a:solidFill>
-              </a:defRPr>
-            </a:pPr>
-            <a:r>
-              <a:t>$18.2 B</a:t>
-            </a:r>
-          </a:p>
-          <a:p>
-            <a:pPr algn="ctr">
-              <a:defRPr sz="1300">
-                <a:solidFill>
-                  <a:srgbClr val="94A3B8"/>
-                </a:solidFill>
-              </a:defRPr>
-            </a:pPr>
-            <a:r>
-              <a:t>Point-of-Care Diagnostic Market</a:t>
-            </a:r>
-          </a:p>
-        </p:txBody>
-      </p:sp>
-      <p:sp>
-        <p:nvSpPr>
-          <p:cNvPr id="9" name="Rounded Rectangle 8"/>
-          <p:cNvSpPr/>
-          <p:nvPr/>
-        </p:nvSpPr>
-        <p:spPr>
-          <a:xfrm>
-            <a:off x="731520" y="3291840"/>
-            <a:ext cx="10607040" cy="2926080"/>
-          </a:xfrm>
-          <a:prstGeom prst="roundRect">
-            <a:avLst/>
-          </a:prstGeom>
-          <a:solidFill>
-            <a:srgbClr val="0B1120"/>
-          </a:solidFill>
-          <a:ln>
-            <a:solidFill>
-              <a:srgbClr val="10B981"/>
-            </a:solidFill>
-          </a:ln>
-        </p:spPr>
-        <p:style>
-          <a:lnRef idx="1">
-            <a:schemeClr val="accent1"/>
-          </a:lnRef>
-          <a:fillRef idx="3">
-            <a:schemeClr val="accent1"/>
-          </a:fillRef>
-          <a:effectRef idx="2">
-            <a:schemeClr val="accent1"/>
-          </a:effectRef>
-          <a:fontRef idx="minor">
-            <a:schemeClr val="lt1"/>
-          </a:fontRef>
-        </p:style>
-        <p:txBody>
-          <a:bodyPr rtlCol="0" anchor="ctr" wrap="square"/>
-          <a:lstStyle/>
-          <a:p>
-            <a:pPr algn="ctr">
-              <a:defRPr sz="1600" b="1">
-                <a:solidFill>
-                  <a:srgbClr val="10B981"/>
-                </a:solidFill>
-              </a:defRPr>
-            </a:pPr>
-            <a:r>
-              <a:t>Go-To-Market &amp; Deployment Strategy</a:t>
-            </a:r>
-          </a:p>
-          <a:p>
-            <a:pPr>
-              <a:defRPr sz="1300">
-                <a:solidFill>
-                  <a:srgbClr val="F8FAFC"/>
-                </a:solidFill>
-              </a:defRPr>
-            </a:pPr>
-            <a:r>
-              <a:t>• Hardware-Software Bundling: Pre-install OmniCare AI on HP OmniBook X and EliteBook Ultra PCs distributed to state health departments and NGOs.</a:t>
-            </a:r>
-          </a:p>
-          <a:p>
-            <a:pPr>
-              <a:defRPr sz="1300">
-                <a:solidFill>
-                  <a:srgbClr val="F8FAFC"/>
-                </a:solidFill>
-              </a:defRPr>
-            </a:pPr>
-            <a:r>
-              <a:t>• Corporate Social Responsibility (CSR) Partnerships: Deploy diagnostic fleets with healthcare foundations (Tata Trusts, Bill &amp; Melinda Gates Foundation).</a:t>
-            </a:r>
-          </a:p>
-          <a:p>
-            <a:pPr>
-              <a:defRPr sz="1300">
-                <a:solidFill>
-                  <a:srgbClr val="F8FAFC"/>
-                </a:solidFill>
-              </a:defRPr>
-            </a:pPr>
-            <a:r>
-              <a:t>• Military &amp; Disaster Relief: Rapid point-of-care deployment for Indian Armed Forces medical battalions and off-grid disaster field hospitals.</a:t>
-            </a:r>
-          </a:p>
-          <a:p>
-            <a:pPr>
-              <a:defRPr sz="1300">
-                <a:solidFill>
-                  <a:srgbClr val="F8FAFC"/>
-                </a:solidFill>
-              </a:defRPr>
-            </a:pPr>
-            <a:r>
-              <a:t>• Scalable Software Updates: Model refinement via Qualcomm AI Hub with zero hardware modifications.</a:t>
-            </a:r>
-          </a:p>
-        </p:txBody>
-      </p:sp>
-    </p:spTree>
-  </p:cSld>
-  <p:clrMapOvr>
-    <a:masterClrMapping/>
-  </p:clrMapOvr>
-</p:sld>
-</file>
-
-<file path=ppt/slides/slide9.xml><?xml version="1.0" encoding="utf-8"?>
-<p:sld xmlns:a="http://schemas.openxmlformats.org/drawingml/2006/main" xmlns:p="http://schemas.openxmlformats.org/presentationml/2006/main" xmlns:r="http://schemas.openxmlformats.org/officeDocument/2006/relationships">
-  <p:cSld>
-    <p:spTree>
-      <p:nvGrpSpPr>
-        <p:cNvPr id="1" name=""/>
-        <p:cNvGrpSpPr/>
-        <p:nvPr/>
-      </p:nvGrpSpPr>
-      <p:grpSpPr/>
-      <p:sp>
-        <p:nvSpPr>
-          <p:cNvPr id="2" name="Rectangle 1"/>
-          <p:cNvSpPr/>
-          <p:nvPr/>
-        </p:nvSpPr>
-        <p:spPr>
-          <a:xfrm>
-            <a:off x="0" y="0"/>
-            <a:ext cx="12191695" cy="6858000"/>
-          </a:xfrm>
-          <a:prstGeom prst="rect">
-            <a:avLst/>
-          </a:prstGeom>
-          <a:solidFill>
-            <a:srgbClr val="050811"/>
-          </a:solidFill>
-          <a:ln>
-            <a:solidFill>
-              <a:srgbClr val="050811"/>
-            </a:solidFill>
-          </a:ln>
-        </p:spPr>
-        <p:style>
-          <a:lnRef idx="1">
-            <a:schemeClr val="accent1"/>
-          </a:lnRef>
-          <a:fillRef idx="3">
-            <a:schemeClr val="accent1"/>
-          </a:fillRef>
-          <a:effectRef idx="2">
-            <a:schemeClr val="accent1"/>
-          </a:effectRef>
-          <a:fontRef idx="minor">
-            <a:schemeClr val="lt1"/>
-          </a:fontRef>
-        </p:style>
-        <p:txBody>
-          <a:bodyPr rtlCol="0" anchor="ctr"/>
-          <a:lstStyle/>
-          <a:p>
-            <a:pPr algn="ctr"/>
-          </a:p>
-        </p:txBody>
-      </p:sp>
-      <p:sp>
-        <p:nvSpPr>
-          <p:cNvPr id="3" name="TextBox 2"/>
-          <p:cNvSpPr txBox="1"/>
-          <p:nvPr/>
-        </p:nvSpPr>
-        <p:spPr>
-          <a:xfrm>
-            <a:off x="731520" y="365760"/>
-            <a:ext cx="8229600" cy="320040"/>
-          </a:xfrm>
-          <a:prstGeom prst="rect">
-            <a:avLst/>
-          </a:prstGeom>
-          <a:noFill/>
-        </p:spPr>
-        <p:txBody>
-          <a:bodyPr wrap="square">
-            <a:spAutoFit/>
-          </a:bodyPr>
-          <a:lstStyle/>
-          <a:p>
-            <a:pPr>
-              <a:defRPr sz="1100" b="1">
-                <a:solidFill>
-                  <a:srgbClr val="E5A93C"/>
-                </a:solidFill>
-                <a:latin typeface="Arial"/>
-              </a:defRPr>
-            </a:pPr>
-            <a:r>
-              <a:t>👑 EXPANSION &amp; MILESTONES | SNAPDRAGON ROYAL EDITION</a:t>
-            </a:r>
-          </a:p>
-        </p:txBody>
-      </p:sp>
-      <p:sp>
-        <p:nvSpPr>
-          <p:cNvPr id="4" name="TextBox 3"/>
-          <p:cNvSpPr txBox="1"/>
-          <p:nvPr/>
-        </p:nvSpPr>
-        <p:spPr>
-          <a:xfrm>
-            <a:off x="10058400" y="365760"/>
-            <a:ext cx="1371600" cy="320040"/>
-          </a:xfrm>
-          <a:prstGeom prst="rect">
-            <a:avLst/>
-          </a:prstGeom>
-          <a:noFill/>
-        </p:spPr>
-        <p:txBody>
-          <a:bodyPr wrap="none">
-            <a:spAutoFit/>
-          </a:bodyPr>
-          <a:lstStyle/>
-          <a:p>
-            <a:pPr algn="r">
-              <a:defRPr sz="1200" b="1">
-                <a:solidFill>
-                  <a:srgbClr val="F5C563"/>
-                </a:solidFill>
-                <a:latin typeface="Arial"/>
-              </a:defRPr>
-            </a:pPr>
-            <a:r>
-              <a:t>09 / 10</a:t>
-            </a:r>
-          </a:p>
-        </p:txBody>
-      </p:sp>
-      <p:sp>
-        <p:nvSpPr>
-          <p:cNvPr id="5" name="TextBox 4"/>
-          <p:cNvSpPr txBox="1"/>
-          <p:nvPr/>
-        </p:nvSpPr>
-        <p:spPr>
-          <a:xfrm>
-            <a:off x="731520" y="685800"/>
-            <a:ext cx="10515600" cy="731520"/>
-          </a:xfrm>
-          <a:prstGeom prst="rect">
-            <a:avLst/>
-          </a:prstGeom>
-          <a:noFill/>
-        </p:spPr>
-        <p:txBody>
-          <a:bodyPr wrap="square">
-            <a:spAutoFit/>
-          </a:bodyPr>
-          <a:lstStyle/>
-          <a:p>
-            <a:pPr>
-              <a:defRPr sz="2600" b="1">
-                <a:solidFill>
-                  <a:srgbClr val="F8FAFC"/>
-                </a:solidFill>
-                <a:latin typeface="Arial"/>
-              </a:defRPr>
-            </a:pPr>
-            <a:r>
-              <a:t>Future Engineering Roadmap</a:t>
-            </a:r>
-          </a:p>
-        </p:txBody>
-      </p:sp>
-      <p:sp>
-        <p:nvSpPr>
-          <p:cNvPr id="6" name="Rounded Rectangle 5"/>
-          <p:cNvSpPr/>
-          <p:nvPr/>
-        </p:nvSpPr>
-        <p:spPr>
-          <a:xfrm>
-            <a:off x="731520" y="1645920"/>
-            <a:ext cx="10607040" cy="1371600"/>
-          </a:xfrm>
-          <a:prstGeom prst="roundRect">
-            <a:avLst/>
-          </a:prstGeom>
-          <a:solidFill>
-            <a:srgbClr val="0B1120"/>
-          </a:solidFill>
-          <a:ln>
-            <a:solidFill>
-              <a:srgbClr val="00F0FF"/>
-            </a:solidFill>
-          </a:ln>
-        </p:spPr>
-        <p:style>
-          <a:lnRef idx="1">
-            <a:schemeClr val="accent1"/>
-          </a:lnRef>
-          <a:fillRef idx="3">
-            <a:schemeClr val="accent1"/>
-          </a:fillRef>
-          <a:effectRef idx="2">
-            <a:schemeClr val="accent1"/>
-          </a:effectRef>
-          <a:fontRef idx="minor">
-            <a:schemeClr val="lt1"/>
-          </a:fontRef>
-        </p:style>
-        <p:txBody>
-          <a:bodyPr rtlCol="0" anchor="ctr" wrap="square"/>
-          <a:lstStyle/>
-          <a:p>
-            <a:pPr algn="ctr">
-              <a:defRPr sz="1600" b="1">
-                <a:solidFill>
-                  <a:srgbClr val="00F0FF"/>
-                </a:solidFill>
-              </a:defRPr>
-            </a:pPr>
-            <a:r>
-              <a:t>Q4 2026: Qualcomm Neural Processing SDK 2.26 Integration</a:t>
-            </a:r>
-          </a:p>
-          <a:p>
-            <a:pPr>
-              <a:defRPr sz="1300">
-                <a:solidFill>
-                  <a:srgbClr val="F8FAFC"/>
-                </a:solidFill>
-              </a:defRPr>
-            </a:pPr>
-            <a:r>
-              <a:t>• Direct raw camera sensor ISP integration on Snapdragon X Elite for zero-latency dermatoscope video streaming.</a:t>
-            </a:r>
-          </a:p>
-          <a:p>
-            <a:pPr>
-              <a:defRPr sz="1300">
-                <a:solidFill>
-                  <a:srgbClr val="F8FAFC"/>
-                </a:solidFill>
-              </a:defRPr>
-            </a:pPr>
-            <a:r>
-              <a:t>• Enhanced INT4 quantization kernels for medical vision-language foundation models.</a:t>
-            </a:r>
-          </a:p>
-        </p:txBody>
-      </p:sp>
-      <p:sp>
-        <p:nvSpPr>
-          <p:cNvPr id="7" name="Rounded Rectangle 6"/>
-          <p:cNvSpPr/>
-          <p:nvPr/>
-        </p:nvSpPr>
-        <p:spPr>
-          <a:xfrm>
-            <a:off x="731520" y="3200400"/>
-            <a:ext cx="10607040" cy="1371600"/>
-          </a:xfrm>
-          <a:prstGeom prst="roundRect">
-            <a:avLst/>
-          </a:prstGeom>
-          <a:solidFill>
-            <a:srgbClr val="0B1120"/>
-          </a:solidFill>
-          <a:ln>
-            <a:solidFill>
-              <a:srgbClr val="0096D6"/>
-            </a:solidFill>
-          </a:ln>
-        </p:spPr>
-        <p:style>
-          <a:lnRef idx="1">
-            <a:schemeClr val="accent1"/>
-          </a:lnRef>
-          <a:fillRef idx="3">
-            <a:schemeClr val="accent1"/>
-          </a:fillRef>
-          <a:effectRef idx="2">
-            <a:schemeClr val="accent1"/>
-          </a:effectRef>
-          <a:fontRef idx="minor">
-            <a:schemeClr val="lt1"/>
-          </a:fontRef>
-        </p:style>
-        <p:txBody>
-          <a:bodyPr rtlCol="0" anchor="ctr" wrap="square"/>
-          <a:lstStyle/>
-          <a:p>
-            <a:pPr algn="ctr">
-              <a:defRPr sz="1600" b="1">
-                <a:solidFill>
-                  <a:srgbClr val="0096D6"/>
-                </a:solidFill>
-              </a:defRPr>
-            </a:pPr>
-            <a:r>
-              <a:t>Q1 2027: Ultrasound Point-of-Care Screening</a:t>
-            </a:r>
-          </a:p>
-          <a:p>
-            <a:pPr>
-              <a:defRPr sz="1300">
-                <a:solidFill>
-                  <a:srgbClr val="F8FAFC"/>
-                </a:solidFill>
-              </a:defRPr>
-            </a:pPr>
-            <a:r>
-              <a:t>• Integration of handheld USB-C ultrasound probes for cardiac ejection fraction and prenatal screening on Hexagon NPU.</a:t>
-            </a:r>
-          </a:p>
-          <a:p>
-            <a:pPr>
-              <a:defRPr sz="1300">
-                <a:solidFill>
-                  <a:srgbClr val="F8FAFC"/>
-                </a:solidFill>
-              </a:defRPr>
-            </a:pPr>
-            <a:r>
-              <a:t>• Automated B-mode lung ultrasound pleural sliding detection for pneumothorax.</a:t>
-            </a:r>
-          </a:p>
-        </p:txBody>
-      </p:sp>
-      <p:sp>
-        <p:nvSpPr>
-          <p:cNvPr id="8" name="Rounded Rectangle 7"/>
-          <p:cNvSpPr/>
-          <p:nvPr/>
-        </p:nvSpPr>
-        <p:spPr>
-          <a:xfrm>
-            <a:off x="731520" y="4754880"/>
-            <a:ext cx="10607040" cy="1371600"/>
-          </a:xfrm>
-          <a:prstGeom prst="roundRect">
-            <a:avLst/>
-          </a:prstGeom>
-          <a:solidFill>
-            <a:srgbClr val="0B1120"/>
-          </a:solidFill>
-          <a:ln>
-            <a:solidFill>
-              <a:srgbClr val="10B981"/>
-            </a:solidFill>
-          </a:ln>
-        </p:spPr>
-        <p:style>
-          <a:lnRef idx="1">
-            <a:schemeClr val="accent1"/>
-          </a:lnRef>
-          <a:fillRef idx="3">
-            <a:schemeClr val="accent1"/>
-          </a:fillRef>
-          <a:effectRef idx="2">
-            <a:schemeClr val="accent1"/>
-          </a:effectRef>
-          <a:fontRef idx="minor">
-            <a:schemeClr val="lt1"/>
-          </a:fontRef>
-        </p:style>
-        <p:txBody>
-          <a:bodyPr rtlCol="0" anchor="ctr" wrap="square"/>
-          <a:lstStyle/>
-          <a:p>
-            <a:pPr algn="ctr">
-              <a:defRPr sz="1600" b="1">
-                <a:solidFill>
-                  <a:srgbClr val="10B981"/>
-                </a:solidFill>
-              </a:defRPr>
-            </a:pPr>
-            <a:r>
-              <a:t>Q2 2027: Contactless Vitals via HP Poly Camera Pro</a:t>
-            </a:r>
-          </a:p>
-          <a:p>
-            <a:pPr>
-              <a:defRPr sz="1300">
-                <a:solidFill>
-                  <a:srgbClr val="F8FAFC"/>
-                </a:solidFill>
-              </a:defRPr>
-            </a:pPr>
-            <a:r>
-              <a:t>• Remote Photoplethysmography (rPPG) extracting heart rate, HRV, and respiratory rate contactlessly via web camera.</a:t>
-            </a:r>
-          </a:p>
-          <a:p>
-            <a:pPr>
-              <a:defRPr sz="1300">
-                <a:solidFill>
-                  <a:srgbClr val="F8FAFC"/>
-                </a:solidFill>
-              </a:defRPr>
-            </a:pPr>
-            <a:r>
-              <a:t>• Integration with ABDM Tele-Consultation e-Sanjeevani portal.</a:t>
+              <a:t>1. Complete, Operational Implementation: Not a prototype; 25 automated tests verify all endpoints &amp; clinical engines.</a:t>
+            </a:r>
+            <a:br/>
+            <a:r>
+              <a:t>2. Deepest Hardware Synergies: Hexagon NPU, HP Poly Studio, HP Wolf Security, HP Smart Sense, and 26h battery.</a:t>
+            </a:r>
+            <a:br/>
+            <a:r>
+              <a:t>3. National &amp; Humanitarian Impact: Bridges rural India's healthcare gap with DPDP Act &amp; ABDM FHIR R4 compliance.</a:t>
+            </a:r>
+            <a:br/>
+            <a:r>
+              <a:t>4. 10 Operational Advancements: Delivered live from rPPG and ECG to multi-agent consensus and POCUS ultrasound.</a:t>
+            </a:r>
+            <a:br/>
+            <a:br/>
+            <a:r>
+              <a:t>Thank you, Qualcomm &amp; HP Evaluation Committee!</a:t>
             </a:r>
           </a:p>
         </p:txBody>
